--- a/Documentation/Slides/Week_16.pptx
+++ b/Documentation/Slides/Week_16.pptx
@@ -5,7 +5,7 @@
     <p:sldMasterId id="2147483648" r:id="rId4"/>
   </p:sldMasterIdLst>
   <p:notesMasterIdLst>
-    <p:notesMasterId r:id="rId12"/>
+    <p:notesMasterId r:id="rId16"/>
   </p:notesMasterIdLst>
   <p:sldIdLst>
     <p:sldId id="267" r:id="rId5"/>
@@ -13,37 +13,41 @@
     <p:sldId id="280" r:id="rId7"/>
     <p:sldId id="301" r:id="rId8"/>
     <p:sldId id="302" r:id="rId9"/>
-    <p:sldId id="278" r:id="rId10"/>
-    <p:sldId id="277" r:id="rId11"/>
+    <p:sldId id="304" r:id="rId10"/>
+    <p:sldId id="305" r:id="rId11"/>
+    <p:sldId id="306" r:id="rId12"/>
+    <p:sldId id="307" r:id="rId13"/>
+    <p:sldId id="278" r:id="rId14"/>
+    <p:sldId id="277" r:id="rId15"/>
   </p:sldIdLst>
   <p:sldSz cx="9144000" cy="6858000" type="screen4x3"/>
   <p:notesSz cx="6858000" cy="9144000"/>
   <p:embeddedFontLst>
     <p:embeddedFont>
-      <p:font typeface="Acumin Pro Condensed Semibold" panose="020B0604020202020204" charset="0"/>
-      <p:regular r:id="rId13"/>
-      <p:bold r:id="rId14"/>
-      <p:italic r:id="rId15"/>
-      <p:boldItalic r:id="rId16"/>
+      <p:font typeface="Acumin Pro Condensed Semibold" panose="020B0706020202020204" pitchFamily="34" charset="77"/>
+      <p:regular r:id="rId17"/>
+      <p:bold r:id="rId18"/>
+      <p:italic r:id="rId19"/>
+      <p:boldItalic r:id="rId20"/>
     </p:embeddedFont>
     <p:embeddedFont>
-      <p:font typeface="Acumin Pro Medium" panose="020B0604020202020204" charset="0"/>
-      <p:regular r:id="rId17"/>
-      <p:italic r:id="rId18"/>
-    </p:embeddedFont>
-    <p:embeddedFont>
-      <p:font typeface="Franklin Gothic Book" panose="020B0503020102020204" pitchFamily="34" charset="0"/>
-      <p:regular r:id="rId19"/>
-      <p:italic r:id="rId20"/>
-    </p:embeddedFont>
-    <p:embeddedFont>
-      <p:font typeface="Franklin Gothic Medium" panose="020B0603020102020204" pitchFamily="34" charset="0"/>
+      <p:font typeface="Acumin Pro Medium" panose="020B0604020202020204" pitchFamily="34" charset="77"/>
       <p:regular r:id="rId21"/>
       <p:italic r:id="rId22"/>
     </p:embeddedFont>
     <p:embeddedFont>
+      <p:font typeface="Franklin Gothic Book" panose="020B0503020102020204" pitchFamily="34" charset="0"/>
+      <p:regular r:id="rId23"/>
+      <p:italic r:id="rId24"/>
+    </p:embeddedFont>
+    <p:embeddedFont>
+      <p:font typeface="Franklin Gothic Medium" panose="020B0603020102020204" pitchFamily="34" charset="0"/>
+      <p:regular r:id="rId25"/>
+      <p:italic r:id="rId26"/>
+    </p:embeddedFont>
+    <p:embeddedFont>
       <p:font typeface="Franklin Gothic Medium Cond" panose="020B0606030402020204" pitchFamily="34" charset="0"/>
-      <p:regular r:id="rId23"/>
+      <p:regular r:id="rId27"/>
     </p:embeddedFont>
   </p:embeddedFontLst>
   <p:defaultTextStyle>
@@ -248,7 +252,7 @@
           <a:p>
             <a:fld id="{01926CF7-48D8-2F46-AFC8-8A5D2298DFDD}" type="datetimeFigureOut">
               <a:rPr lang="en-US" smtClean="0"/>
-              <a:t>12/11/2025</a:t>
+              <a:t>12/15/25</a:t>
             </a:fld>
             <a:endParaRPr lang="en-US"/>
           </a:p>
@@ -13677,6 +13681,301 @@
 </p:sld>
 </file>
 
+<file path=ppt/slides/slide10.xml><?xml version="1.0" encoding="utf-8"?>
+<p:sld xmlns:a="http://schemas.openxmlformats.org/drawingml/2006/main" xmlns:r="http://schemas.openxmlformats.org/officeDocument/2006/relationships" xmlns:p="http://schemas.openxmlformats.org/presentationml/2006/main">
+  <p:cSld>
+    <p:spTree>
+      <p:nvGrpSpPr>
+        <p:cNvPr id="1" name=""/>
+        <p:cNvGrpSpPr/>
+        <p:nvPr/>
+      </p:nvGrpSpPr>
+      <p:grpSpPr>
+        <a:xfrm>
+          <a:off x="0" y="0"/>
+          <a:ext cx="0" cy="0"/>
+          <a:chOff x="0" y="0"/>
+          <a:chExt cx="0" cy="0"/>
+        </a:xfrm>
+      </p:grpSpPr>
+      <p:sp>
+        <p:nvSpPr>
+          <p:cNvPr id="2" name="Text Placeholder 1">
+            <a:extLst>
+              <a:ext uri="{FF2B5EF4-FFF2-40B4-BE49-F238E27FC236}">
+                <a16:creationId xmlns:a16="http://schemas.microsoft.com/office/drawing/2014/main" id="{11B29CAD-3B43-3BC0-D2EC-A53874ABB884}"/>
+              </a:ext>
+            </a:extLst>
+          </p:cNvPr>
+          <p:cNvSpPr>
+            <a:spLocks noGrp="1"/>
+          </p:cNvSpPr>
+          <p:nvPr>
+            <p:ph type="body" sz="quarter" idx="11"/>
+          </p:nvPr>
+        </p:nvSpPr>
+        <p:spPr/>
+        <p:txBody>
+          <a:bodyPr/>
+          <a:lstStyle/>
+          <a:p>
+            <a:r>
+              <a:rPr lang="en-US" dirty="0"/>
+              <a:t>Blockers &amp; Next Week’s Work</a:t>
+            </a:r>
+          </a:p>
+        </p:txBody>
+      </p:sp>
+      <p:sp>
+        <p:nvSpPr>
+          <p:cNvPr id="3" name="Text Placeholder 2">
+            <a:extLst>
+              <a:ext uri="{FF2B5EF4-FFF2-40B4-BE49-F238E27FC236}">
+                <a16:creationId xmlns:a16="http://schemas.microsoft.com/office/drawing/2014/main" id="{A9F87380-04A3-DD16-EAB3-0921830BDF50}"/>
+              </a:ext>
+            </a:extLst>
+          </p:cNvPr>
+          <p:cNvSpPr>
+            <a:spLocks noGrp="1"/>
+          </p:cNvSpPr>
+          <p:nvPr>
+            <p:ph type="body" sz="quarter" idx="10"/>
+          </p:nvPr>
+        </p:nvSpPr>
+        <p:spPr/>
+        <p:txBody>
+          <a:bodyPr/>
+          <a:lstStyle/>
+          <a:p>
+            <a:pPr marL="285750" indent="-285750">
+              <a:buFont typeface="Arial" panose="020B0604020202020204" pitchFamily="34" charset="0"/>
+              <a:buChar char="•"/>
+            </a:pPr>
+            <a:r>
+              <a:rPr lang="en-US" dirty="0"/>
+              <a:t>Ensure PCB shipment arrives</a:t>
+            </a:r>
+          </a:p>
+          <a:p>
+            <a:pPr marL="285750" indent="-285750">
+              <a:buFont typeface="Arial" panose="020B0604020202020204" pitchFamily="34" charset="0"/>
+              <a:buChar char="•"/>
+            </a:pPr>
+            <a:r>
+              <a:rPr lang="en-US" dirty="0"/>
+              <a:t>Get started on data storage option chosen</a:t>
+            </a:r>
+          </a:p>
+          <a:p>
+            <a:pPr marL="285750" indent="-285750">
+              <a:buFont typeface="Arial" panose="020B0604020202020204" pitchFamily="34" charset="0"/>
+              <a:buChar char="•"/>
+            </a:pPr>
+            <a:r>
+              <a:rPr lang="en-US" dirty="0"/>
+              <a:t>Analyze Actual Chicken Data pulled from Agriculture Department</a:t>
+            </a:r>
+          </a:p>
+          <a:p>
+            <a:pPr marL="285750" indent="-285750">
+              <a:buFont typeface="Arial" panose="020B0604020202020204" pitchFamily="34" charset="0"/>
+              <a:buChar char="•"/>
+            </a:pPr>
+            <a:r>
+              <a:rPr lang="en-US" dirty="0"/>
+              <a:t>Finish Rev. 4 of PCB</a:t>
+            </a:r>
+          </a:p>
+          <a:p>
+            <a:pPr marL="628650" lvl="1" indent="-285750">
+              <a:buFont typeface="Arial" panose="020B0604020202020204" pitchFamily="34" charset="0"/>
+              <a:buChar char="•"/>
+            </a:pPr>
+            <a:endParaRPr lang="en-US" dirty="0"/>
+          </a:p>
+          <a:p>
+            <a:pPr marL="285750" indent="-285750">
+              <a:buFont typeface="Arial" panose="020B0604020202020204" pitchFamily="34" charset="0"/>
+              <a:buChar char="•"/>
+            </a:pPr>
+            <a:endParaRPr lang="en-US" dirty="0"/>
+          </a:p>
+          <a:p>
+            <a:r>
+              <a:rPr lang="en-US" dirty="0"/>
+              <a:t>Blockers:</a:t>
+            </a:r>
+          </a:p>
+          <a:p>
+            <a:pPr marL="285750" indent="-285750">
+              <a:buFont typeface="Arial" panose="020B0604020202020204" pitchFamily="34" charset="0"/>
+              <a:buChar char="•"/>
+            </a:pPr>
+            <a:r>
+              <a:rPr lang="en-US" dirty="0"/>
+              <a:t>Heavy traffic for JLCPCB around this season, need to ensure every component of the order is placed correctly</a:t>
+            </a:r>
+          </a:p>
+        </p:txBody>
+      </p:sp>
+      <p:sp>
+        <p:nvSpPr>
+          <p:cNvPr id="4" name="Title 3">
+            <a:extLst>
+              <a:ext uri="{FF2B5EF4-FFF2-40B4-BE49-F238E27FC236}">
+                <a16:creationId xmlns:a16="http://schemas.microsoft.com/office/drawing/2014/main" id="{47D02411-52BC-0A6C-B958-234593BB194F}"/>
+              </a:ext>
+            </a:extLst>
+          </p:cNvPr>
+          <p:cNvSpPr>
+            <a:spLocks noGrp="1"/>
+          </p:cNvSpPr>
+          <p:nvPr>
+            <p:ph type="title"/>
+          </p:nvPr>
+        </p:nvSpPr>
+        <p:spPr/>
+        <p:txBody>
+          <a:bodyPr/>
+          <a:lstStyle/>
+          <a:p>
+            <a:r>
+              <a:rPr lang="en-US" dirty="0"/>
+              <a:t>Next Week</a:t>
+            </a:r>
+          </a:p>
+        </p:txBody>
+      </p:sp>
+      <p:sp>
+        <p:nvSpPr>
+          <p:cNvPr id="5" name="Footer Placeholder 4">
+            <a:extLst>
+              <a:ext uri="{FF2B5EF4-FFF2-40B4-BE49-F238E27FC236}">
+                <a16:creationId xmlns:a16="http://schemas.microsoft.com/office/drawing/2014/main" id="{51BAB307-58AA-C3F2-0BBB-500351B01F7A}"/>
+              </a:ext>
+            </a:extLst>
+          </p:cNvPr>
+          <p:cNvSpPr>
+            <a:spLocks noGrp="1"/>
+          </p:cNvSpPr>
+          <p:nvPr>
+            <p:ph type="ftr" sz="quarter" idx="12"/>
+          </p:nvPr>
+        </p:nvSpPr>
+        <p:spPr/>
+        <p:txBody>
+          <a:bodyPr/>
+          <a:lstStyle/>
+          <a:p>
+            <a:pPr algn="r"/>
+            <a:r>
+              <a:rPr lang="en-US" dirty="0"/>
+              <a:t>6/7</a:t>
+            </a:r>
+          </a:p>
+        </p:txBody>
+      </p:sp>
+    </p:spTree>
+    <p:extLst>
+      <p:ext uri="{BB962C8B-B14F-4D97-AF65-F5344CB8AC3E}">
+        <p14:creationId xmlns:p14="http://schemas.microsoft.com/office/powerpoint/2010/main" val="257444251"/>
+      </p:ext>
+    </p:extLst>
+  </p:cSld>
+  <p:clrMapOvr>
+    <a:masterClrMapping/>
+  </p:clrMapOvr>
+</p:sld>
+</file>
+
+<file path=ppt/slides/slide11.xml><?xml version="1.0" encoding="utf-8"?>
+<p:sld xmlns:a="http://schemas.openxmlformats.org/drawingml/2006/main" xmlns:r="http://schemas.openxmlformats.org/officeDocument/2006/relationships" xmlns:p="http://schemas.openxmlformats.org/presentationml/2006/main">
+  <p:cSld>
+    <p:spTree>
+      <p:nvGrpSpPr>
+        <p:cNvPr id="1" name=""/>
+        <p:cNvGrpSpPr/>
+        <p:nvPr/>
+      </p:nvGrpSpPr>
+      <p:grpSpPr>
+        <a:xfrm>
+          <a:off x="0" y="0"/>
+          <a:ext cx="0" cy="0"/>
+          <a:chOff x="0" y="0"/>
+          <a:chExt cx="0" cy="0"/>
+        </a:xfrm>
+      </p:grpSpPr>
+      <p:sp>
+        <p:nvSpPr>
+          <p:cNvPr id="2" name="Title 1">
+            <a:extLst>
+              <a:ext uri="{FF2B5EF4-FFF2-40B4-BE49-F238E27FC236}">
+                <a16:creationId xmlns:a16="http://schemas.microsoft.com/office/drawing/2014/main" id="{E4E72CBA-026F-7E96-546F-23B8813A83DA}"/>
+              </a:ext>
+            </a:extLst>
+          </p:cNvPr>
+          <p:cNvSpPr>
+            <a:spLocks noGrp="1"/>
+          </p:cNvSpPr>
+          <p:nvPr>
+            <p:ph type="title"/>
+          </p:nvPr>
+        </p:nvSpPr>
+        <p:spPr/>
+        <p:txBody>
+          <a:bodyPr/>
+          <a:lstStyle/>
+          <a:p>
+            <a:r>
+              <a:rPr lang="en-US" dirty="0"/>
+              <a:t>Thank You</a:t>
+            </a:r>
+          </a:p>
+        </p:txBody>
+      </p:sp>
+      <p:sp>
+        <p:nvSpPr>
+          <p:cNvPr id="3" name="Text Placeholder 2">
+            <a:extLst>
+              <a:ext uri="{FF2B5EF4-FFF2-40B4-BE49-F238E27FC236}">
+                <a16:creationId xmlns:a16="http://schemas.microsoft.com/office/drawing/2014/main" id="{CE8FBDCD-BC38-D4A8-A210-EA02F2610057}"/>
+              </a:ext>
+            </a:extLst>
+          </p:cNvPr>
+          <p:cNvSpPr>
+            <a:spLocks noGrp="1"/>
+          </p:cNvSpPr>
+          <p:nvPr>
+            <p:ph type="body" sz="quarter" idx="10"/>
+          </p:nvPr>
+        </p:nvSpPr>
+        <p:spPr/>
+        <p:txBody>
+          <a:bodyPr>
+            <a:normAutofit/>
+          </a:bodyPr>
+          <a:lstStyle/>
+          <a:p>
+            <a:r>
+              <a:rPr lang="en-US" dirty="0"/>
+              <a:t>Purdue Polytechnic Institute</a:t>
+            </a:r>
+          </a:p>
+        </p:txBody>
+      </p:sp>
+    </p:spTree>
+    <p:extLst>
+      <p:ext uri="{BB962C8B-B14F-4D97-AF65-F5344CB8AC3E}">
+        <p14:creationId xmlns:p14="http://schemas.microsoft.com/office/powerpoint/2010/main" val="3555266232"/>
+      </p:ext>
+    </p:extLst>
+  </p:cSld>
+  <p:clrMapOvr>
+    <a:masterClrMapping/>
+  </p:clrMapOvr>
+</p:sld>
+</file>
+
 <file path=ppt/slides/slide2.xml><?xml version="1.0" encoding="utf-8"?>
 <p:sld xmlns:a="http://schemas.openxmlformats.org/drawingml/2006/main" xmlns:r="http://schemas.openxmlformats.org/officeDocument/2006/relationships" xmlns:p="http://schemas.openxmlformats.org/presentationml/2006/main">
   <p:cSld>
@@ -13763,13 +14062,53 @@
             </a:r>
           </a:p>
           <a:p>
+            <a:pPr marL="285750" indent="-285750">
+              <a:buFont typeface="Arial" panose="020B0604020202020204" pitchFamily="34" charset="0"/>
+              <a:buChar char="•"/>
+            </a:pPr>
+            <a:r>
+              <a:rPr lang="en-US" dirty="0"/>
+              <a:t>Case Study on Data Options</a:t>
+            </a:r>
+          </a:p>
+          <a:p>
             <a:pPr marL="628650" lvl="1" indent="-285750">
               <a:buFont typeface="Arial" panose="020B0604020202020204" pitchFamily="34" charset="0"/>
               <a:buChar char="•"/>
             </a:pPr>
             <a:r>
               <a:rPr lang="en-US" dirty="0"/>
-              <a:t>Communication with JLCPCB service</a:t>
+              <a:t>(1) Local</a:t>
+            </a:r>
+          </a:p>
+          <a:p>
+            <a:pPr marL="628650" lvl="1" indent="-285750">
+              <a:buFont typeface="Arial" panose="020B0604020202020204" pitchFamily="34" charset="0"/>
+              <a:buChar char="•"/>
+            </a:pPr>
+            <a:r>
+              <a:rPr lang="en-US" dirty="0"/>
+              <a:t>(2) Cloud</a:t>
+            </a:r>
+          </a:p>
+          <a:p>
+            <a:pPr marL="628650" lvl="1" indent="-285750">
+              <a:buFont typeface="Arial" panose="020B0604020202020204" pitchFamily="34" charset="0"/>
+              <a:buChar char="•"/>
+            </a:pPr>
+            <a:r>
+              <a:rPr lang="en-US" dirty="0"/>
+              <a:t>(3) Hybrid</a:t>
+            </a:r>
+          </a:p>
+          <a:p>
+            <a:pPr marL="628650" lvl="1" indent="-285750">
+              <a:buFont typeface="Arial" panose="020B0604020202020204" pitchFamily="34" charset="0"/>
+              <a:buChar char="•"/>
+            </a:pPr>
+            <a:r>
+              <a:rPr lang="en-US" dirty="0"/>
+              <a:t>(4) React Framework</a:t>
             </a:r>
           </a:p>
           <a:p>
@@ -13779,37 +14118,7 @@
             </a:pPr>
             <a:r>
               <a:rPr lang="en-US" dirty="0"/>
-              <a:t>Case Study on Data Options</a:t>
-            </a:r>
-          </a:p>
-          <a:p>
-            <a:pPr marL="628650" lvl="1" indent="-285750">
-              <a:buFont typeface="Arial" panose="020B0604020202020204" pitchFamily="34" charset="0"/>
-              <a:buChar char="•"/>
-            </a:pPr>
-            <a:r>
-              <a:rPr lang="en-US" dirty="0"/>
-              <a:t>(1) Local</a:t>
-            </a:r>
-          </a:p>
-          <a:p>
-            <a:pPr marL="628650" lvl="1" indent="-285750">
-              <a:buFont typeface="Arial" panose="020B0604020202020204" pitchFamily="34" charset="0"/>
-              <a:buChar char="•"/>
-            </a:pPr>
-            <a:r>
-              <a:rPr lang="en-US" dirty="0"/>
-              <a:t>(2) Cloud</a:t>
-            </a:r>
-          </a:p>
-          <a:p>
-            <a:pPr marL="628650" lvl="1" indent="-285750">
-              <a:buFont typeface="Arial" panose="020B0604020202020204" pitchFamily="34" charset="0"/>
-              <a:buChar char="•"/>
-            </a:pPr>
-            <a:r>
-              <a:rPr lang="en-US" dirty="0"/>
-              <a:t>(3) Hybrid</a:t>
+              <a:t>Rework of Wheatstone Bridge</a:t>
             </a:r>
           </a:p>
           <a:p>
@@ -13819,17 +14128,7 @@
             </a:pPr>
             <a:r>
               <a:rPr lang="en-US" dirty="0"/>
-              <a:t>Item 3?</a:t>
-            </a:r>
-          </a:p>
-          <a:p>
-            <a:pPr marL="285750" indent="-285750">
-              <a:buFont typeface="Arial" panose="020B0604020202020204" pitchFamily="34" charset="0"/>
-              <a:buChar char="•"/>
-            </a:pPr>
-            <a:r>
-              <a:rPr lang="en-US" dirty="0"/>
-              <a:t>Item 4?</a:t>
+              <a:t>Delivery of Device for Data Logging to the Agriculture Department</a:t>
             </a:r>
           </a:p>
           <a:p>
@@ -13957,7 +14256,11 @@
           <a:lstStyle/>
           <a:p>
             <a:r>
-              <a:rPr lang="en-US" dirty="0"/>
+              <a:rPr lang="en-US" b="1" i="1" kern="1200" cap="none" baseline="0">
+                <a:latin typeface="Acumin Pro Condensed Semibold" panose="020B0506020202020204" pitchFamily="34" charset="77"/>
+                <a:ea typeface="+mj-ea"/>
+                <a:cs typeface="+mj-cs"/>
+              </a:rPr>
               <a:t>PCB Regeneration</a:t>
             </a:r>
           </a:p>
@@ -13980,7 +14283,7 @@
         <p:spPr>
           <a:xfrm>
             <a:off x="351065" y="1543324"/>
-            <a:ext cx="5060384" cy="4390338"/>
+            <a:ext cx="4220935" cy="4390338"/>
           </a:xfrm>
           <a:prstGeom prst="rect">
             <a:avLst/>
@@ -14161,11 +14464,124 @@
             </a:pPr>
             <a:r>
               <a:rPr lang="en-US" dirty="0"/>
-              <a:t>Contacted JLCPCB to Inquire why drill files were missing</a:t>
-            </a:r>
-          </a:p>
-        </p:txBody>
-      </p:sp>
+              <a:t>Shipment Delayed</a:t>
+            </a:r>
+          </a:p>
+          <a:p>
+            <a:pPr marL="171450" indent="-171450">
+              <a:buFont typeface="Wingdings" pitchFamily="2" charset="2"/>
+              <a:buChar char="§"/>
+            </a:pPr>
+            <a:r>
+              <a:rPr lang="en-US" dirty="0"/>
+              <a:t>Contacted JLCPCB to Inquire about the shipment delay</a:t>
+            </a:r>
+          </a:p>
+          <a:p>
+            <a:pPr marL="514350" lvl="2" indent="-171450">
+              <a:spcBef>
+                <a:spcPts val="750"/>
+              </a:spcBef>
+              <a:buFont typeface="Wingdings" pitchFamily="2" charset="2"/>
+              <a:buChar char="§"/>
+            </a:pPr>
+            <a:r>
+              <a:rPr lang="en-US" sz="1800" dirty="0">
+                <a:latin typeface="Acumin Pro" panose="020B0504020202020204" pitchFamily="34" charset="77"/>
+              </a:rPr>
+              <a:t>Initially a problem with parts sourcing</a:t>
+            </a:r>
+          </a:p>
+          <a:p>
+            <a:pPr marL="514350" lvl="2" indent="-171450">
+              <a:spcBef>
+                <a:spcPts val="750"/>
+              </a:spcBef>
+              <a:buFont typeface="Wingdings" pitchFamily="2" charset="2"/>
+              <a:buChar char="§"/>
+            </a:pPr>
+            <a:r>
+              <a:rPr lang="en-US" sz="1800" dirty="0">
+                <a:latin typeface="Acumin Pro" panose="020B0504020202020204" pitchFamily="34" charset="77"/>
+              </a:rPr>
+              <a:t>Looked closer and it was an issue with drill file generation</a:t>
+            </a:r>
+          </a:p>
+          <a:p>
+            <a:pPr marL="514350" lvl="2" indent="-171450">
+              <a:spcBef>
+                <a:spcPts val="750"/>
+              </a:spcBef>
+              <a:buFont typeface="Wingdings" pitchFamily="2" charset="2"/>
+              <a:buChar char="§"/>
+            </a:pPr>
+            <a:r>
+              <a:rPr lang="en-US" sz="1800" dirty="0">
+                <a:latin typeface="Acumin Pro" panose="020B0504020202020204" pitchFamily="34" charset="77"/>
+              </a:rPr>
+              <a:t>Regenerated drill files</a:t>
+            </a:r>
+          </a:p>
+          <a:p>
+            <a:pPr marL="514350" lvl="2" indent="-171450">
+              <a:spcBef>
+                <a:spcPts val="750"/>
+              </a:spcBef>
+              <a:buFont typeface="Wingdings" pitchFamily="2" charset="2"/>
+              <a:buChar char="§"/>
+            </a:pPr>
+            <a:r>
+              <a:rPr lang="en-US" sz="1800" dirty="0">
+                <a:latin typeface="Acumin Pro" panose="020B0504020202020204" pitchFamily="34" charset="77"/>
+              </a:rPr>
+              <a:t>New Shipment before next week</a:t>
+            </a:r>
+          </a:p>
+          <a:p>
+            <a:pPr marL="171450" lvl="1" indent="-171450">
+              <a:spcBef>
+                <a:spcPts val="750"/>
+              </a:spcBef>
+              <a:buFont typeface="Wingdings" pitchFamily="2" charset="2"/>
+              <a:buChar char="§"/>
+            </a:pPr>
+            <a:endParaRPr lang="en-US" sz="1800" dirty="0">
+              <a:latin typeface="Acumin Pro" panose="020B0504020202020204" pitchFamily="34" charset="77"/>
+            </a:endParaRPr>
+          </a:p>
+        </p:txBody>
+      </p:sp>
+      <p:pic>
+        <p:nvPicPr>
+          <p:cNvPr id="6" name="Picture 5" descr="A screenshot of a computer&#10;&#10;AI-generated content may be incorrect.">
+            <a:extLst>
+              <a:ext uri="{FF2B5EF4-FFF2-40B4-BE49-F238E27FC236}">
+                <a16:creationId xmlns:a16="http://schemas.microsoft.com/office/drawing/2014/main" id="{352B7DA5-33BC-40D3-7619-EF6E66FF20EE}"/>
+              </a:ext>
+            </a:extLst>
+          </p:cNvPr>
+          <p:cNvPicPr>
+            <a:picLocks noChangeAspect="1"/>
+          </p:cNvPicPr>
+          <p:nvPr/>
+        </p:nvPicPr>
+        <p:blipFill>
+          <a:blip r:embed="rId2"/>
+          <a:stretch>
+            <a:fillRect/>
+          </a:stretch>
+        </p:blipFill>
+        <p:spPr>
+          <a:xfrm>
+            <a:off x="4731868" y="2156580"/>
+            <a:ext cx="4069232" cy="3163826"/>
+          </a:xfrm>
+          <a:prstGeom prst="rect">
+            <a:avLst/>
+          </a:prstGeom>
+          <a:noFill/>
+        </p:spPr>
+      </p:pic>
       <p:sp>
         <p:nvSpPr>
           <p:cNvPr id="2" name="Text Placeholder 1">
@@ -14190,7 +14606,7 @@
         </p:spPr>
         <p:txBody>
           <a:bodyPr vert="horz" lIns="91440" tIns="45720" rIns="91440" bIns="45720" rtlCol="0">
-            <a:normAutofit/>
+            <a:normAutofit lnSpcReduction="10000"/>
           </a:bodyPr>
           <a:lstStyle/>
           <a:p>
@@ -14315,7 +14731,7 @@
           <a:p>
             <a:r>
               <a:rPr lang="en-US" dirty="0"/>
-              <a:t>PCB Regeneration</a:t>
+              <a:t>Case Study on Data Options</a:t>
             </a:r>
           </a:p>
         </p:txBody>
@@ -14516,10 +14932,7 @@
               <a:buFont typeface="Wingdings" pitchFamily="2" charset="2"/>
               <a:buChar char="§"/>
             </a:pPr>
-            <a:r>
-              <a:rPr lang="en-US" dirty="0"/>
-              <a:t>Contacted JLCPCB to Inquire why drill files were missing</a:t>
-            </a:r>
+            <a:endParaRPr lang="en-US" dirty="0"/>
           </a:p>
         </p:txBody>
       </p:sp>
@@ -14552,13 +14965,16 @@
           <a:lstStyle/>
           <a:p>
             <a:r>
-              <a:rPr lang="en-US" b="1" i="0" kern="1200" baseline="0" dirty="0">
-                <a:latin typeface="Acumin Pro Condensed Semibold" panose="020B0506020202020204" pitchFamily="34" charset="77"/>
-                <a:ea typeface="+mn-ea"/>
-                <a:cs typeface="+mn-cs"/>
-              </a:rPr>
-              <a:t>Communication with JLCPCB service</a:t>
-            </a:r>
+              <a:rPr lang="en-US" dirty="0"/>
+              <a:t>Local Storage</a:t>
+            </a:r>
+          </a:p>
+          <a:p>
+            <a:endParaRPr lang="en-US" b="1" i="0" kern="1200" baseline="0" dirty="0">
+              <a:latin typeface="Acumin Pro Condensed Semibold" panose="020B0506020202020204" pitchFamily="34" charset="77"/>
+              <a:ea typeface="+mn-ea"/>
+              <a:cs typeface="+mn-cs"/>
+            </a:endParaRPr>
           </a:p>
         </p:txBody>
       </p:sp>
@@ -14606,6 +15022,75 @@
                 <a:cs typeface="+mn-cs"/>
               </a:rPr>
               <a:t>/7</a:t>
+            </a:r>
+          </a:p>
+        </p:txBody>
+      </p:sp>
+      <p:sp>
+        <p:nvSpPr>
+          <p:cNvPr id="12" name="TextBox 11">
+            <a:extLst>
+              <a:ext uri="{FF2B5EF4-FFF2-40B4-BE49-F238E27FC236}">
+                <a16:creationId xmlns:a16="http://schemas.microsoft.com/office/drawing/2014/main" id="{FB3212F5-601C-151E-16C4-D15DB8422B8E}"/>
+              </a:ext>
+            </a:extLst>
+          </p:cNvPr>
+          <p:cNvSpPr txBox="1"/>
+          <p:nvPr/>
+        </p:nvSpPr>
+        <p:spPr>
+          <a:xfrm>
+            <a:off x="351063" y="1397675"/>
+            <a:ext cx="7819159" cy="1754326"/>
+          </a:xfrm>
+          <a:prstGeom prst="rect">
+            <a:avLst/>
+          </a:prstGeom>
+          <a:noFill/>
+        </p:spPr>
+        <p:txBody>
+          <a:bodyPr wrap="square">
+            <a:spAutoFit/>
+          </a:bodyPr>
+          <a:lstStyle/>
+          <a:p>
+            <a:pPr marL="285750" indent="-285750">
+              <a:buFont typeface="Arial" panose="020B0604020202020204" pitchFamily="34" charset="0"/>
+              <a:buChar char="•"/>
+            </a:pPr>
+            <a:r>
+              <a:rPr lang="en-US" dirty="0"/>
+              <a:t>Data stored will be stored on the device or on a laptop running an application</a:t>
+            </a:r>
+          </a:p>
+          <a:p>
+            <a:pPr marL="285750" indent="-285750">
+              <a:buFont typeface="Arial" panose="020B0604020202020204" pitchFamily="34" charset="0"/>
+              <a:buChar char="•"/>
+            </a:pPr>
+            <a:r>
+              <a:rPr lang="en-US" dirty="0"/>
+              <a:t>Highly reliable for offline environments and easily supports four-sensor data</a:t>
+            </a:r>
+          </a:p>
+          <a:p>
+            <a:pPr marL="285750" indent="-285750">
+              <a:buFont typeface="Arial" panose="020B0604020202020204" pitchFamily="34" charset="0"/>
+              <a:buChar char="•"/>
+            </a:pPr>
+            <a:r>
+              <a:rPr lang="en-US" dirty="0"/>
+              <a:t>Possibility to use external hardware to serve as a bridge between device and storage</a:t>
+            </a:r>
+          </a:p>
+          <a:p>
+            <a:pPr marL="285750" indent="-285750">
+              <a:buFont typeface="Arial" panose="020B0604020202020204" pitchFamily="34" charset="0"/>
+              <a:buChar char="•"/>
+            </a:pPr>
+            <a:r>
+              <a:rPr lang="en-US" u="sng" dirty="0"/>
+              <a:t>Minimal cost, more difficult to develop</a:t>
             </a:r>
           </a:p>
         </p:txBody>
@@ -14631,7 +15116,7 @@
         <p:cNvPr id="1" name="">
           <a:extLst>
             <a:ext uri="{FF2B5EF4-FFF2-40B4-BE49-F238E27FC236}">
-              <a16:creationId xmlns:a16="http://schemas.microsoft.com/office/drawing/2014/main" id="{05F708BA-A9D8-B5B4-808D-446D71B7A8A0}"/>
+              <a16:creationId xmlns:a16="http://schemas.microsoft.com/office/drawing/2014/main" id="{AEE951A9-6871-7C33-B114-ADF13CA244DC}"/>
             </a:ext>
           </a:extLst>
         </p:cNvPr>
@@ -14651,7 +15136,7 @@
           <p:cNvPr id="4" name="Title 3">
             <a:extLst>
               <a:ext uri="{FF2B5EF4-FFF2-40B4-BE49-F238E27FC236}">
-                <a16:creationId xmlns:a16="http://schemas.microsoft.com/office/drawing/2014/main" id="{4008252B-0F18-06B9-BE12-3E365C62A22F}"/>
+                <a16:creationId xmlns:a16="http://schemas.microsoft.com/office/drawing/2014/main" id="{F8FCB1C9-7D4F-63CD-1AEB-E4D9346206BB}"/>
               </a:ext>
             </a:extLst>
           </p:cNvPr>
@@ -14686,7 +15171,7 @@
           <p:cNvPr id="7" name="Text Placeholder 2">
             <a:extLst>
               <a:ext uri="{FF2B5EF4-FFF2-40B4-BE49-F238E27FC236}">
-                <a16:creationId xmlns:a16="http://schemas.microsoft.com/office/drawing/2014/main" id="{56204028-B979-BAB7-FB1E-75E83E1E9A86}"/>
+                <a16:creationId xmlns:a16="http://schemas.microsoft.com/office/drawing/2014/main" id="{1DA87E1F-EA4B-F137-361E-1EABE93680AC}"/>
               </a:ext>
             </a:extLst>
           </p:cNvPr>
@@ -14873,10 +15358,11 @@
             </a:lvl9pPr>
           </a:lstStyle>
           <a:p>
-            <a:r>
-              <a:rPr lang="en-US" dirty="0"/>
-              <a:t>Preferred Method of Data Transfer</a:t>
-            </a:r>
+            <a:pPr marL="171450" indent="-171450">
+              <a:buFont typeface="Wingdings" pitchFamily="2" charset="2"/>
+              <a:buChar char="§"/>
+            </a:pPr>
+            <a:endParaRPr lang="en-US" dirty="0"/>
           </a:p>
         </p:txBody>
       </p:sp>
@@ -14885,7 +15371,7 @@
           <p:cNvPr id="2" name="Text Placeholder 1">
             <a:extLst>
               <a:ext uri="{FF2B5EF4-FFF2-40B4-BE49-F238E27FC236}">
-                <a16:creationId xmlns:a16="http://schemas.microsoft.com/office/drawing/2014/main" id="{C8DB951D-548B-BAA4-FE51-3A6C1371822C}"/>
+                <a16:creationId xmlns:a16="http://schemas.microsoft.com/office/drawing/2014/main" id="{2AF7566D-C18B-1E10-F91E-749C1A037CB8}"/>
               </a:ext>
             </a:extLst>
           </p:cNvPr>
@@ -14909,13 +15395,16 @@
           <a:lstStyle/>
           <a:p>
             <a:r>
-              <a:rPr lang="en-US" b="1" i="0" kern="1200" baseline="0" dirty="0">
-                <a:latin typeface="Acumin Pro Condensed Semibold" panose="020B0506020202020204" pitchFamily="34" charset="77"/>
-                <a:ea typeface="+mn-ea"/>
-                <a:cs typeface="+mn-cs"/>
-              </a:rPr>
-              <a:t>1 (Local)</a:t>
-            </a:r>
+              <a:rPr lang="en-US" dirty="0"/>
+              <a:t>Hybrid Option</a:t>
+            </a:r>
+          </a:p>
+          <a:p>
+            <a:endParaRPr lang="en-US" b="1" i="0" kern="1200" baseline="0" dirty="0">
+              <a:latin typeface="Acumin Pro Condensed Semibold" panose="020B0506020202020204" pitchFamily="34" charset="77"/>
+              <a:ea typeface="+mn-ea"/>
+              <a:cs typeface="+mn-cs"/>
+            </a:endParaRPr>
           </a:p>
         </p:txBody>
       </p:sp>
@@ -14924,7 +15413,7 @@
           <p:cNvPr id="5" name="Footer Placeholder 4">
             <a:extLst>
               <a:ext uri="{FF2B5EF4-FFF2-40B4-BE49-F238E27FC236}">
-                <a16:creationId xmlns:a16="http://schemas.microsoft.com/office/drawing/2014/main" id="{0D856527-B378-51F8-6C8C-BD88369DF43D}"/>
+                <a16:creationId xmlns:a16="http://schemas.microsoft.com/office/drawing/2014/main" id="{65FD2967-29C7-B72E-F45F-099A3B3FDDC4}"/>
               </a:ext>
             </a:extLst>
           </p:cNvPr>
@@ -14954,7 +15443,7 @@
             </a:pPr>
             <a:r>
               <a:rPr lang="en-US" dirty="0"/>
-              <a:t>5</a:t>
+              <a:t>4</a:t>
             </a:r>
             <a:r>
               <a:rPr lang="en-US" kern="1200" dirty="0">
@@ -14967,10 +15456,79 @@
           </a:p>
         </p:txBody>
       </p:sp>
+      <p:sp>
+        <p:nvSpPr>
+          <p:cNvPr id="8" name="TextBox 7">
+            <a:extLst>
+              <a:ext uri="{FF2B5EF4-FFF2-40B4-BE49-F238E27FC236}">
+                <a16:creationId xmlns:a16="http://schemas.microsoft.com/office/drawing/2014/main" id="{0A42BDA1-E966-1EBC-2113-D4F8561D702E}"/>
+              </a:ext>
+            </a:extLst>
+          </p:cNvPr>
+          <p:cNvSpPr txBox="1"/>
+          <p:nvPr/>
+        </p:nvSpPr>
+        <p:spPr>
+          <a:xfrm>
+            <a:off x="342899" y="1320051"/>
+            <a:ext cx="8458199" cy="1754326"/>
+          </a:xfrm>
+          <a:prstGeom prst="rect">
+            <a:avLst/>
+          </a:prstGeom>
+          <a:noFill/>
+        </p:spPr>
+        <p:txBody>
+          <a:bodyPr wrap="square">
+            <a:spAutoFit/>
+          </a:bodyPr>
+          <a:lstStyle/>
+          <a:p>
+            <a:pPr marL="285750" indent="-285750">
+              <a:buFont typeface="Arial" panose="020B0604020202020204" pitchFamily="34" charset="0"/>
+              <a:buChar char="•"/>
+            </a:pPr>
+            <a:r>
+              <a:rPr lang="en-US" dirty="0"/>
+              <a:t>Local logging with periodic cloud sync (3 times x 8 hours / day).</a:t>
+            </a:r>
+          </a:p>
+          <a:p>
+            <a:pPr marL="285750" indent="-285750">
+              <a:buFont typeface="Arial" panose="020B0604020202020204" pitchFamily="34" charset="0"/>
+              <a:buChar char="•"/>
+            </a:pPr>
+            <a:r>
+              <a:rPr lang="en-US" dirty="0"/>
+              <a:t>Reduces bandwidth usage while providing remote accessibility and backup redundancy.</a:t>
+            </a:r>
+          </a:p>
+          <a:p>
+            <a:pPr marL="285750" indent="-285750">
+              <a:buFont typeface="Arial" panose="020B0604020202020204" pitchFamily="34" charset="0"/>
+              <a:buChar char="•"/>
+            </a:pPr>
+            <a:r>
+              <a:rPr lang="en-US" dirty="0"/>
+              <a:t>Cost: moderate—local hardware + limited cloud storage (No need for higher end web options)</a:t>
+            </a:r>
+          </a:p>
+          <a:p>
+            <a:pPr marL="285750" indent="-285750">
+              <a:buFont typeface="Arial" panose="020B0604020202020204" pitchFamily="34" charset="0"/>
+              <a:buChar char="•"/>
+            </a:pPr>
+            <a:r>
+              <a:rPr lang="en-US" u="sng" dirty="0"/>
+              <a:t>Medium cost, medium difficulty to develop</a:t>
+            </a:r>
+          </a:p>
+        </p:txBody>
+      </p:sp>
     </p:spTree>
     <p:extLst>
       <p:ext uri="{BB962C8B-B14F-4D97-AF65-F5344CB8AC3E}">
-        <p14:creationId xmlns:p14="http://schemas.microsoft.com/office/powerpoint/2010/main" val="910746028"/>
+        <p14:creationId xmlns:p14="http://schemas.microsoft.com/office/powerpoint/2010/main" val="2267029620"/>
       </p:ext>
     </p:extLst>
   </p:cSld>
@@ -14981,6 +15539,959 @@
 </file>
 
 <file path=ppt/slides/slide6.xml><?xml version="1.0" encoding="utf-8"?>
+<p:sld xmlns:a="http://schemas.openxmlformats.org/drawingml/2006/main" xmlns:r="http://schemas.openxmlformats.org/officeDocument/2006/relationships" xmlns:p="http://schemas.openxmlformats.org/presentationml/2006/main">
+  <p:cSld>
+    <p:spTree>
+      <p:nvGrpSpPr>
+        <p:cNvPr id="1" name="">
+          <a:extLst>
+            <a:ext uri="{FF2B5EF4-FFF2-40B4-BE49-F238E27FC236}">
+              <a16:creationId xmlns:a16="http://schemas.microsoft.com/office/drawing/2014/main" id="{8A4B48BA-68A2-AA79-600B-FFEA3BF88AC1}"/>
+            </a:ext>
+          </a:extLst>
+        </p:cNvPr>
+        <p:cNvGrpSpPr/>
+        <p:nvPr/>
+      </p:nvGrpSpPr>
+      <p:grpSpPr>
+        <a:xfrm>
+          <a:off x="0" y="0"/>
+          <a:ext cx="0" cy="0"/>
+          <a:chOff x="0" y="0"/>
+          <a:chExt cx="0" cy="0"/>
+        </a:xfrm>
+      </p:grpSpPr>
+      <p:sp>
+        <p:nvSpPr>
+          <p:cNvPr id="4" name="Title 3">
+            <a:extLst>
+              <a:ext uri="{FF2B5EF4-FFF2-40B4-BE49-F238E27FC236}">
+                <a16:creationId xmlns:a16="http://schemas.microsoft.com/office/drawing/2014/main" id="{549D2165-29F9-A825-5F31-177A7B6F340E}"/>
+              </a:ext>
+            </a:extLst>
+          </p:cNvPr>
+          <p:cNvSpPr>
+            <a:spLocks noGrp="1"/>
+          </p:cNvSpPr>
+          <p:nvPr>
+            <p:ph type="title"/>
+          </p:nvPr>
+        </p:nvSpPr>
+        <p:spPr>
+          <a:xfrm>
+            <a:off x="351064" y="385004"/>
+            <a:ext cx="8450036" cy="589032"/>
+          </a:xfrm>
+        </p:spPr>
+        <p:txBody>
+          <a:bodyPr vert="horz" lIns="91440" tIns="45720" rIns="91440" bIns="45720" rtlCol="0" anchor="ctr">
+            <a:normAutofit/>
+          </a:bodyPr>
+          <a:lstStyle/>
+          <a:p>
+            <a:r>
+              <a:rPr lang="en-US" dirty="0"/>
+              <a:t>Case Study on Data Options</a:t>
+            </a:r>
+            <a:endParaRPr lang="en-US" b="1" i="1" kern="1200" cap="none" baseline="0" dirty="0">
+              <a:latin typeface="Acumin Pro Condensed Semibold" panose="020B0506020202020204" pitchFamily="34" charset="77"/>
+              <a:ea typeface="+mj-ea"/>
+              <a:cs typeface="+mj-cs"/>
+            </a:endParaRPr>
+          </a:p>
+        </p:txBody>
+      </p:sp>
+      <p:sp>
+        <p:nvSpPr>
+          <p:cNvPr id="7" name="Text Placeholder 2">
+            <a:extLst>
+              <a:ext uri="{FF2B5EF4-FFF2-40B4-BE49-F238E27FC236}">
+                <a16:creationId xmlns:a16="http://schemas.microsoft.com/office/drawing/2014/main" id="{E5187EDB-41C8-D17E-7A34-D6D9A193B941}"/>
+              </a:ext>
+            </a:extLst>
+          </p:cNvPr>
+          <p:cNvSpPr txBox="1">
+            <a:spLocks/>
+          </p:cNvSpPr>
+          <p:nvPr/>
+        </p:nvSpPr>
+        <p:spPr>
+          <a:xfrm>
+            <a:off x="351065" y="1543324"/>
+            <a:ext cx="4220935" cy="4390338"/>
+          </a:xfrm>
+          <a:prstGeom prst="rect">
+            <a:avLst/>
+          </a:prstGeom>
+        </p:spPr>
+        <p:txBody>
+          <a:bodyPr vert="horz" lIns="91440" tIns="45720" rIns="91440" bIns="45720" numCol="1" rtlCol="0">
+            <a:normAutofit/>
+          </a:bodyPr>
+          <a:lstStyle>
+            <a:lvl1pPr marL="0" indent="0" algn="l" defTabSz="685800" rtl="0" eaLnBrk="1" fontAlgn="t" latinLnBrk="0" hangingPunct="1">
+              <a:lnSpc>
+                <a:spcPct val="90000"/>
+              </a:lnSpc>
+              <a:spcBef>
+                <a:spcPts val="750"/>
+              </a:spcBef>
+              <a:buFontTx/>
+              <a:buNone/>
+              <a:defRPr sz="1800" b="0" i="0" kern="1200" baseline="0">
+                <a:solidFill>
+                  <a:schemeClr val="tx1"/>
+                </a:solidFill>
+                <a:latin typeface="Acumin Pro" panose="020B0504020202020204" pitchFamily="34" charset="77"/>
+                <a:ea typeface="+mn-ea"/>
+                <a:cs typeface="+mn-cs"/>
+              </a:defRPr>
+            </a:lvl1pPr>
+            <a:lvl2pPr marL="342900" indent="0" algn="l" defTabSz="685800" rtl="0" eaLnBrk="1" latinLnBrk="0" hangingPunct="1">
+              <a:lnSpc>
+                <a:spcPct val="90000"/>
+              </a:lnSpc>
+              <a:spcBef>
+                <a:spcPts val="375"/>
+              </a:spcBef>
+              <a:buFontTx/>
+              <a:buNone/>
+              <a:defRPr sz="1350" b="0" i="0" kern="1200" baseline="0">
+                <a:solidFill>
+                  <a:schemeClr val="tx1"/>
+                </a:solidFill>
+                <a:latin typeface="+mn-lt"/>
+                <a:ea typeface="+mn-ea"/>
+                <a:cs typeface="+mn-cs"/>
+              </a:defRPr>
+            </a:lvl2pPr>
+            <a:lvl3pPr marL="685800" indent="0" algn="l" defTabSz="685800" rtl="0" eaLnBrk="1" latinLnBrk="0" hangingPunct="1">
+              <a:lnSpc>
+                <a:spcPct val="90000"/>
+              </a:lnSpc>
+              <a:spcBef>
+                <a:spcPts val="375"/>
+              </a:spcBef>
+              <a:buFontTx/>
+              <a:buNone/>
+              <a:defRPr sz="1350" b="0" i="0" kern="1200" baseline="0">
+                <a:solidFill>
+                  <a:schemeClr val="tx1"/>
+                </a:solidFill>
+                <a:latin typeface="+mn-lt"/>
+                <a:ea typeface="+mn-ea"/>
+                <a:cs typeface="+mn-cs"/>
+              </a:defRPr>
+            </a:lvl3pPr>
+            <a:lvl4pPr marL="1028700" indent="0" algn="l" defTabSz="685800" rtl="0" eaLnBrk="1" latinLnBrk="0" hangingPunct="1">
+              <a:lnSpc>
+                <a:spcPct val="90000"/>
+              </a:lnSpc>
+              <a:spcBef>
+                <a:spcPts val="375"/>
+              </a:spcBef>
+              <a:buFontTx/>
+              <a:buNone/>
+              <a:defRPr sz="1350" b="0" i="0" kern="1200" baseline="0">
+                <a:solidFill>
+                  <a:schemeClr val="tx1"/>
+                </a:solidFill>
+                <a:latin typeface="+mn-lt"/>
+                <a:ea typeface="+mn-ea"/>
+                <a:cs typeface="+mn-cs"/>
+              </a:defRPr>
+            </a:lvl4pPr>
+            <a:lvl5pPr marL="1371600" indent="0" algn="l" defTabSz="685800" rtl="0" eaLnBrk="1" latinLnBrk="0" hangingPunct="1">
+              <a:lnSpc>
+                <a:spcPct val="90000"/>
+              </a:lnSpc>
+              <a:spcBef>
+                <a:spcPts val="375"/>
+              </a:spcBef>
+              <a:buFontTx/>
+              <a:buNone/>
+              <a:defRPr sz="1350" b="0" i="0" kern="1200" baseline="0">
+                <a:solidFill>
+                  <a:schemeClr val="tx1"/>
+                </a:solidFill>
+                <a:latin typeface="+mn-lt"/>
+                <a:ea typeface="+mn-ea"/>
+                <a:cs typeface="+mn-cs"/>
+              </a:defRPr>
+            </a:lvl5pPr>
+            <a:lvl6pPr marL="1885950" indent="-171450" algn="l" defTabSz="685800" rtl="0" eaLnBrk="1" latinLnBrk="0" hangingPunct="1">
+              <a:lnSpc>
+                <a:spcPct val="90000"/>
+              </a:lnSpc>
+              <a:spcBef>
+                <a:spcPts val="375"/>
+              </a:spcBef>
+              <a:buFont typeface="Arial" panose="020B0604020202020204" pitchFamily="34" charset="0"/>
+              <a:buChar char="•"/>
+              <a:defRPr sz="1350" kern="1200">
+                <a:solidFill>
+                  <a:schemeClr val="tx1"/>
+                </a:solidFill>
+                <a:latin typeface="+mn-lt"/>
+                <a:ea typeface="+mn-ea"/>
+                <a:cs typeface="+mn-cs"/>
+              </a:defRPr>
+            </a:lvl6pPr>
+            <a:lvl7pPr marL="2228850" indent="-171450" algn="l" defTabSz="685800" rtl="0" eaLnBrk="1" latinLnBrk="0" hangingPunct="1">
+              <a:lnSpc>
+                <a:spcPct val="90000"/>
+              </a:lnSpc>
+              <a:spcBef>
+                <a:spcPts val="375"/>
+              </a:spcBef>
+              <a:buFont typeface="Arial" panose="020B0604020202020204" pitchFamily="34" charset="0"/>
+              <a:buChar char="•"/>
+              <a:defRPr sz="1350" kern="1200">
+                <a:solidFill>
+                  <a:schemeClr val="tx1"/>
+                </a:solidFill>
+                <a:latin typeface="+mn-lt"/>
+                <a:ea typeface="+mn-ea"/>
+                <a:cs typeface="+mn-cs"/>
+              </a:defRPr>
+            </a:lvl7pPr>
+            <a:lvl8pPr marL="2571750" indent="-171450" algn="l" defTabSz="685800" rtl="0" eaLnBrk="1" latinLnBrk="0" hangingPunct="1">
+              <a:lnSpc>
+                <a:spcPct val="90000"/>
+              </a:lnSpc>
+              <a:spcBef>
+                <a:spcPts val="375"/>
+              </a:spcBef>
+              <a:buFont typeface="Arial" panose="020B0604020202020204" pitchFamily="34" charset="0"/>
+              <a:buChar char="•"/>
+              <a:defRPr sz="1350" kern="1200">
+                <a:solidFill>
+                  <a:schemeClr val="tx1"/>
+                </a:solidFill>
+                <a:latin typeface="+mn-lt"/>
+                <a:ea typeface="+mn-ea"/>
+                <a:cs typeface="+mn-cs"/>
+              </a:defRPr>
+            </a:lvl8pPr>
+            <a:lvl9pPr marL="2914650" indent="-171450" algn="l" defTabSz="685800" rtl="0" eaLnBrk="1" latinLnBrk="0" hangingPunct="1">
+              <a:lnSpc>
+                <a:spcPct val="90000"/>
+              </a:lnSpc>
+              <a:spcBef>
+                <a:spcPts val="375"/>
+              </a:spcBef>
+              <a:buFont typeface="Arial" panose="020B0604020202020204" pitchFamily="34" charset="0"/>
+              <a:buChar char="•"/>
+              <a:defRPr sz="1350" kern="1200">
+                <a:solidFill>
+                  <a:schemeClr val="tx1"/>
+                </a:solidFill>
+                <a:latin typeface="+mn-lt"/>
+                <a:ea typeface="+mn-ea"/>
+                <a:cs typeface="+mn-cs"/>
+              </a:defRPr>
+            </a:lvl9pPr>
+          </a:lstStyle>
+          <a:p>
+            <a:pPr marL="171450" lvl="1" indent="-171450">
+              <a:spcBef>
+                <a:spcPts val="750"/>
+              </a:spcBef>
+              <a:buFont typeface="Wingdings" pitchFamily="2" charset="2"/>
+              <a:buChar char="§"/>
+            </a:pPr>
+            <a:endParaRPr lang="en-US" sz="1800" dirty="0">
+              <a:latin typeface="Acumin Pro" panose="020B0504020202020204" pitchFamily="34" charset="77"/>
+            </a:endParaRPr>
+          </a:p>
+        </p:txBody>
+      </p:sp>
+      <p:sp>
+        <p:nvSpPr>
+          <p:cNvPr id="2" name="Text Placeholder 1">
+            <a:extLst>
+              <a:ext uri="{FF2B5EF4-FFF2-40B4-BE49-F238E27FC236}">
+                <a16:creationId xmlns:a16="http://schemas.microsoft.com/office/drawing/2014/main" id="{CB7856B3-4902-B03E-B646-7532F26DCDDC}"/>
+              </a:ext>
+            </a:extLst>
+          </p:cNvPr>
+          <p:cNvSpPr>
+            <a:spLocks noGrp="1"/>
+          </p:cNvSpPr>
+          <p:nvPr>
+            <p:ph type="body" sz="quarter" idx="11"/>
+          </p:nvPr>
+        </p:nvSpPr>
+        <p:spPr>
+          <a:xfrm>
+            <a:off x="342900" y="954291"/>
+            <a:ext cx="8458200" cy="365760"/>
+          </a:xfrm>
+        </p:spPr>
+        <p:txBody>
+          <a:bodyPr vert="horz" lIns="91440" tIns="45720" rIns="91440" bIns="45720" rtlCol="0">
+            <a:normAutofit lnSpcReduction="10000"/>
+          </a:bodyPr>
+          <a:lstStyle/>
+          <a:p>
+            <a:r>
+              <a:rPr lang="en-US" b="1" i="0" kern="1200" baseline="0" dirty="0">
+                <a:latin typeface="Acumin Pro Condensed Semibold" panose="020B0506020202020204" pitchFamily="34" charset="77"/>
+                <a:ea typeface="+mn-ea"/>
+                <a:cs typeface="+mn-cs"/>
+              </a:rPr>
+              <a:t>Cloud Option</a:t>
+            </a:r>
+          </a:p>
+        </p:txBody>
+      </p:sp>
+      <p:sp>
+        <p:nvSpPr>
+          <p:cNvPr id="5" name="Footer Placeholder 4">
+            <a:extLst>
+              <a:ext uri="{FF2B5EF4-FFF2-40B4-BE49-F238E27FC236}">
+                <a16:creationId xmlns:a16="http://schemas.microsoft.com/office/drawing/2014/main" id="{BC82468A-515F-43DF-806A-A9A3FE67C17C}"/>
+              </a:ext>
+            </a:extLst>
+          </p:cNvPr>
+          <p:cNvSpPr>
+            <a:spLocks noGrp="1"/>
+          </p:cNvSpPr>
+          <p:nvPr>
+            <p:ph type="ftr" sz="quarter" idx="14"/>
+          </p:nvPr>
+        </p:nvSpPr>
+        <p:spPr>
+          <a:xfrm>
+            <a:off x="7461174" y="6295058"/>
+            <a:ext cx="1339925" cy="323970"/>
+          </a:xfrm>
+        </p:spPr>
+        <p:txBody>
+          <a:bodyPr vert="horz" lIns="91440" tIns="45720" rIns="91440" bIns="45720" rtlCol="0" anchor="ctr">
+            <a:normAutofit/>
+          </a:bodyPr>
+          <a:lstStyle/>
+          <a:p>
+            <a:pPr algn="r">
+              <a:spcAft>
+                <a:spcPts val="600"/>
+              </a:spcAft>
+            </a:pPr>
+            <a:r>
+              <a:rPr lang="en-US" kern="1200">
+                <a:latin typeface="Acumin Pro" panose="020B0504020202020204" pitchFamily="34" charset="77"/>
+                <a:ea typeface="+mn-ea"/>
+                <a:cs typeface="+mn-cs"/>
+              </a:rPr>
+              <a:t>3/7</a:t>
+            </a:r>
+          </a:p>
+        </p:txBody>
+      </p:sp>
+      <p:sp>
+        <p:nvSpPr>
+          <p:cNvPr id="10" name="TextBox 9">
+            <a:extLst>
+              <a:ext uri="{FF2B5EF4-FFF2-40B4-BE49-F238E27FC236}">
+                <a16:creationId xmlns:a16="http://schemas.microsoft.com/office/drawing/2014/main" id="{42EEBEE9-3AEE-FD5F-A4E3-77D0747D8BF1}"/>
+              </a:ext>
+            </a:extLst>
+          </p:cNvPr>
+          <p:cNvSpPr txBox="1"/>
+          <p:nvPr/>
+        </p:nvSpPr>
+        <p:spPr>
+          <a:xfrm>
+            <a:off x="342900" y="1409343"/>
+            <a:ext cx="8293100" cy="2862322"/>
+          </a:xfrm>
+          <a:prstGeom prst="rect">
+            <a:avLst/>
+          </a:prstGeom>
+          <a:noFill/>
+        </p:spPr>
+        <p:txBody>
+          <a:bodyPr wrap="square">
+            <a:spAutoFit/>
+          </a:bodyPr>
+          <a:lstStyle/>
+          <a:p>
+            <a:pPr marL="285750" indent="-285750">
+              <a:buFont typeface="Arial" panose="020B0604020202020204" pitchFamily="34" charset="0"/>
+              <a:buChar char="•"/>
+            </a:pPr>
+            <a:r>
+              <a:rPr lang="en-US" dirty="0"/>
+              <a:t>Data uploaded directly to GitHub, AWS, or Firebase.</a:t>
+            </a:r>
+          </a:p>
+          <a:p>
+            <a:pPr marL="285750" indent="-285750">
+              <a:buFont typeface="Arial" panose="020B0604020202020204" pitchFamily="34" charset="0"/>
+              <a:buChar char="•"/>
+            </a:pPr>
+            <a:r>
+              <a:rPr lang="en-US" dirty="0"/>
+              <a:t>Enables remote monitoring based on reliable server providers</a:t>
+            </a:r>
+          </a:p>
+          <a:p>
+            <a:r>
+              <a:rPr lang="en-US" dirty="0"/>
+              <a:t>Approximate costs:</a:t>
+            </a:r>
+          </a:p>
+          <a:p>
+            <a:r>
+              <a:rPr lang="en-US" dirty="0"/>
+              <a:t>GitHub: $4–$12/month for private repo tiers with higher storage</a:t>
+            </a:r>
+          </a:p>
+          <a:p>
+            <a:r>
+              <a:rPr lang="en-US" dirty="0"/>
+              <a:t>AWS S3: $0.023/GB per month for storage; additional data transfer charges</a:t>
+            </a:r>
+          </a:p>
+          <a:p>
+            <a:r>
+              <a:rPr lang="en-US" dirty="0"/>
+              <a:t>Firebase: $25–$100/month depending on read/write volume and database usage</a:t>
+            </a:r>
+          </a:p>
+          <a:p>
+            <a:pPr marL="285750" indent="-285750">
+              <a:buFont typeface="Arial" panose="020B0604020202020204" pitchFamily="34" charset="0"/>
+              <a:buChar char="•"/>
+            </a:pPr>
+            <a:r>
+              <a:rPr lang="en-US" dirty="0"/>
+              <a:t>Requires stable internet (Not a problem for the agriculture department)</a:t>
+            </a:r>
+          </a:p>
+          <a:p>
+            <a:pPr marL="285750" indent="-285750">
+              <a:buFont typeface="Arial" panose="020B0604020202020204" pitchFamily="34" charset="0"/>
+              <a:buChar char="•"/>
+            </a:pPr>
+            <a:r>
+              <a:rPr lang="en-US" dirty="0"/>
+              <a:t>Higher data uploads would cost more (Unsure if this would be a problem due to the nature of our data)</a:t>
+            </a:r>
+          </a:p>
+          <a:p>
+            <a:pPr marL="285750" indent="-285750">
+              <a:buFont typeface="Arial" panose="020B0604020202020204" pitchFamily="34" charset="0"/>
+              <a:buChar char="•"/>
+            </a:pPr>
+            <a:r>
+              <a:rPr lang="en-US" u="sng" dirty="0"/>
+              <a:t>Higher cost, easy to develop</a:t>
+            </a:r>
+          </a:p>
+        </p:txBody>
+      </p:sp>
+    </p:spTree>
+    <p:extLst>
+      <p:ext uri="{BB962C8B-B14F-4D97-AF65-F5344CB8AC3E}">
+        <p14:creationId xmlns:p14="http://schemas.microsoft.com/office/powerpoint/2010/main" val="3446091497"/>
+      </p:ext>
+    </p:extLst>
+  </p:cSld>
+  <p:clrMapOvr>
+    <a:masterClrMapping/>
+  </p:clrMapOvr>
+</p:sld>
+</file>
+
+<file path=ppt/slides/slide7.xml><?xml version="1.0" encoding="utf-8"?>
+<p:sld xmlns:a="http://schemas.openxmlformats.org/drawingml/2006/main" xmlns:r="http://schemas.openxmlformats.org/officeDocument/2006/relationships" xmlns:p="http://schemas.openxmlformats.org/presentationml/2006/main">
+  <p:cSld>
+    <p:spTree>
+      <p:nvGrpSpPr>
+        <p:cNvPr id="1" name="">
+          <a:extLst>
+            <a:ext uri="{FF2B5EF4-FFF2-40B4-BE49-F238E27FC236}">
+              <a16:creationId xmlns:a16="http://schemas.microsoft.com/office/drawing/2014/main" id="{B7778141-DC4E-6794-8025-835BB72DC4A9}"/>
+            </a:ext>
+          </a:extLst>
+        </p:cNvPr>
+        <p:cNvGrpSpPr/>
+        <p:nvPr/>
+      </p:nvGrpSpPr>
+      <p:grpSpPr>
+        <a:xfrm>
+          <a:off x="0" y="0"/>
+          <a:ext cx="0" cy="0"/>
+          <a:chOff x="0" y="0"/>
+          <a:chExt cx="0" cy="0"/>
+        </a:xfrm>
+      </p:grpSpPr>
+      <p:sp>
+        <p:nvSpPr>
+          <p:cNvPr id="4" name="Title 3">
+            <a:extLst>
+              <a:ext uri="{FF2B5EF4-FFF2-40B4-BE49-F238E27FC236}">
+                <a16:creationId xmlns:a16="http://schemas.microsoft.com/office/drawing/2014/main" id="{014F6030-F6CF-62C5-C243-07B3D76193AE}"/>
+              </a:ext>
+            </a:extLst>
+          </p:cNvPr>
+          <p:cNvSpPr>
+            <a:spLocks noGrp="1"/>
+          </p:cNvSpPr>
+          <p:nvPr>
+            <p:ph type="title"/>
+          </p:nvPr>
+        </p:nvSpPr>
+        <p:spPr>
+          <a:xfrm>
+            <a:off x="351064" y="385004"/>
+            <a:ext cx="8450036" cy="589032"/>
+          </a:xfrm>
+        </p:spPr>
+        <p:txBody>
+          <a:bodyPr vert="horz" lIns="91440" tIns="45720" rIns="91440" bIns="45720" rtlCol="0" anchor="ctr">
+            <a:normAutofit/>
+          </a:bodyPr>
+          <a:lstStyle/>
+          <a:p>
+            <a:r>
+              <a:rPr lang="en-US" b="1" i="1" kern="1200" cap="none" baseline="0" dirty="0">
+                <a:latin typeface="Acumin Pro Condensed Semibold" panose="020B0506020202020204" pitchFamily="34" charset="77"/>
+                <a:ea typeface="+mj-ea"/>
+                <a:cs typeface="+mj-cs"/>
+              </a:rPr>
+              <a:t>Case Study on Data Options</a:t>
+            </a:r>
+          </a:p>
+        </p:txBody>
+      </p:sp>
+      <p:sp>
+        <p:nvSpPr>
+          <p:cNvPr id="7" name="Text Placeholder 2">
+            <a:extLst>
+              <a:ext uri="{FF2B5EF4-FFF2-40B4-BE49-F238E27FC236}">
+                <a16:creationId xmlns:a16="http://schemas.microsoft.com/office/drawing/2014/main" id="{0DF36732-7EFB-A723-EA2B-FC38F1376C37}"/>
+              </a:ext>
+            </a:extLst>
+          </p:cNvPr>
+          <p:cNvSpPr txBox="1">
+            <a:spLocks/>
+          </p:cNvSpPr>
+          <p:nvPr/>
+        </p:nvSpPr>
+        <p:spPr>
+          <a:xfrm>
+            <a:off x="351065" y="1543324"/>
+            <a:ext cx="4220935" cy="4390338"/>
+          </a:xfrm>
+          <a:prstGeom prst="rect">
+            <a:avLst/>
+          </a:prstGeom>
+        </p:spPr>
+        <p:txBody>
+          <a:bodyPr vert="horz" lIns="91440" tIns="45720" rIns="91440" bIns="45720" numCol="1" rtlCol="0">
+            <a:normAutofit/>
+          </a:bodyPr>
+          <a:lstStyle>
+            <a:lvl1pPr marL="0" indent="0" algn="l" defTabSz="685800" rtl="0" eaLnBrk="1" fontAlgn="t" latinLnBrk="0" hangingPunct="1">
+              <a:lnSpc>
+                <a:spcPct val="90000"/>
+              </a:lnSpc>
+              <a:spcBef>
+                <a:spcPts val="750"/>
+              </a:spcBef>
+              <a:buFontTx/>
+              <a:buNone/>
+              <a:defRPr sz="1800" b="0" i="0" kern="1200" baseline="0">
+                <a:solidFill>
+                  <a:schemeClr val="tx1"/>
+                </a:solidFill>
+                <a:latin typeface="Acumin Pro" panose="020B0504020202020204" pitchFamily="34" charset="77"/>
+                <a:ea typeface="+mn-ea"/>
+                <a:cs typeface="+mn-cs"/>
+              </a:defRPr>
+            </a:lvl1pPr>
+            <a:lvl2pPr marL="342900" indent="0" algn="l" defTabSz="685800" rtl="0" eaLnBrk="1" latinLnBrk="0" hangingPunct="1">
+              <a:lnSpc>
+                <a:spcPct val="90000"/>
+              </a:lnSpc>
+              <a:spcBef>
+                <a:spcPts val="375"/>
+              </a:spcBef>
+              <a:buFontTx/>
+              <a:buNone/>
+              <a:defRPr sz="1350" b="0" i="0" kern="1200" baseline="0">
+                <a:solidFill>
+                  <a:schemeClr val="tx1"/>
+                </a:solidFill>
+                <a:latin typeface="+mn-lt"/>
+                <a:ea typeface="+mn-ea"/>
+                <a:cs typeface="+mn-cs"/>
+              </a:defRPr>
+            </a:lvl2pPr>
+            <a:lvl3pPr marL="685800" indent="0" algn="l" defTabSz="685800" rtl="0" eaLnBrk="1" latinLnBrk="0" hangingPunct="1">
+              <a:lnSpc>
+                <a:spcPct val="90000"/>
+              </a:lnSpc>
+              <a:spcBef>
+                <a:spcPts val="375"/>
+              </a:spcBef>
+              <a:buFontTx/>
+              <a:buNone/>
+              <a:defRPr sz="1350" b="0" i="0" kern="1200" baseline="0">
+                <a:solidFill>
+                  <a:schemeClr val="tx1"/>
+                </a:solidFill>
+                <a:latin typeface="+mn-lt"/>
+                <a:ea typeface="+mn-ea"/>
+                <a:cs typeface="+mn-cs"/>
+              </a:defRPr>
+            </a:lvl3pPr>
+            <a:lvl4pPr marL="1028700" indent="0" algn="l" defTabSz="685800" rtl="0" eaLnBrk="1" latinLnBrk="0" hangingPunct="1">
+              <a:lnSpc>
+                <a:spcPct val="90000"/>
+              </a:lnSpc>
+              <a:spcBef>
+                <a:spcPts val="375"/>
+              </a:spcBef>
+              <a:buFontTx/>
+              <a:buNone/>
+              <a:defRPr sz="1350" b="0" i="0" kern="1200" baseline="0">
+                <a:solidFill>
+                  <a:schemeClr val="tx1"/>
+                </a:solidFill>
+                <a:latin typeface="+mn-lt"/>
+                <a:ea typeface="+mn-ea"/>
+                <a:cs typeface="+mn-cs"/>
+              </a:defRPr>
+            </a:lvl4pPr>
+            <a:lvl5pPr marL="1371600" indent="0" algn="l" defTabSz="685800" rtl="0" eaLnBrk="1" latinLnBrk="0" hangingPunct="1">
+              <a:lnSpc>
+                <a:spcPct val="90000"/>
+              </a:lnSpc>
+              <a:spcBef>
+                <a:spcPts val="375"/>
+              </a:spcBef>
+              <a:buFontTx/>
+              <a:buNone/>
+              <a:defRPr sz="1350" b="0" i="0" kern="1200" baseline="0">
+                <a:solidFill>
+                  <a:schemeClr val="tx1"/>
+                </a:solidFill>
+                <a:latin typeface="+mn-lt"/>
+                <a:ea typeface="+mn-ea"/>
+                <a:cs typeface="+mn-cs"/>
+              </a:defRPr>
+            </a:lvl5pPr>
+            <a:lvl6pPr marL="1885950" indent="-171450" algn="l" defTabSz="685800" rtl="0" eaLnBrk="1" latinLnBrk="0" hangingPunct="1">
+              <a:lnSpc>
+                <a:spcPct val="90000"/>
+              </a:lnSpc>
+              <a:spcBef>
+                <a:spcPts val="375"/>
+              </a:spcBef>
+              <a:buFont typeface="Arial" panose="020B0604020202020204" pitchFamily="34" charset="0"/>
+              <a:buChar char="•"/>
+              <a:defRPr sz="1350" kern="1200">
+                <a:solidFill>
+                  <a:schemeClr val="tx1"/>
+                </a:solidFill>
+                <a:latin typeface="+mn-lt"/>
+                <a:ea typeface="+mn-ea"/>
+                <a:cs typeface="+mn-cs"/>
+              </a:defRPr>
+            </a:lvl6pPr>
+            <a:lvl7pPr marL="2228850" indent="-171450" algn="l" defTabSz="685800" rtl="0" eaLnBrk="1" latinLnBrk="0" hangingPunct="1">
+              <a:lnSpc>
+                <a:spcPct val="90000"/>
+              </a:lnSpc>
+              <a:spcBef>
+                <a:spcPts val="375"/>
+              </a:spcBef>
+              <a:buFont typeface="Arial" panose="020B0604020202020204" pitchFamily="34" charset="0"/>
+              <a:buChar char="•"/>
+              <a:defRPr sz="1350" kern="1200">
+                <a:solidFill>
+                  <a:schemeClr val="tx1"/>
+                </a:solidFill>
+                <a:latin typeface="+mn-lt"/>
+                <a:ea typeface="+mn-ea"/>
+                <a:cs typeface="+mn-cs"/>
+              </a:defRPr>
+            </a:lvl7pPr>
+            <a:lvl8pPr marL="2571750" indent="-171450" algn="l" defTabSz="685800" rtl="0" eaLnBrk="1" latinLnBrk="0" hangingPunct="1">
+              <a:lnSpc>
+                <a:spcPct val="90000"/>
+              </a:lnSpc>
+              <a:spcBef>
+                <a:spcPts val="375"/>
+              </a:spcBef>
+              <a:buFont typeface="Arial" panose="020B0604020202020204" pitchFamily="34" charset="0"/>
+              <a:buChar char="•"/>
+              <a:defRPr sz="1350" kern="1200">
+                <a:solidFill>
+                  <a:schemeClr val="tx1"/>
+                </a:solidFill>
+                <a:latin typeface="+mn-lt"/>
+                <a:ea typeface="+mn-ea"/>
+                <a:cs typeface="+mn-cs"/>
+              </a:defRPr>
+            </a:lvl8pPr>
+            <a:lvl9pPr marL="2914650" indent="-171450" algn="l" defTabSz="685800" rtl="0" eaLnBrk="1" latinLnBrk="0" hangingPunct="1">
+              <a:lnSpc>
+                <a:spcPct val="90000"/>
+              </a:lnSpc>
+              <a:spcBef>
+                <a:spcPts val="375"/>
+              </a:spcBef>
+              <a:buFont typeface="Arial" panose="020B0604020202020204" pitchFamily="34" charset="0"/>
+              <a:buChar char="•"/>
+              <a:defRPr sz="1350" kern="1200">
+                <a:solidFill>
+                  <a:schemeClr val="tx1"/>
+                </a:solidFill>
+                <a:latin typeface="+mn-lt"/>
+                <a:ea typeface="+mn-ea"/>
+                <a:cs typeface="+mn-cs"/>
+              </a:defRPr>
+            </a:lvl9pPr>
+          </a:lstStyle>
+          <a:p>
+            <a:pPr marL="171450" lvl="1" indent="-171450">
+              <a:spcBef>
+                <a:spcPts val="750"/>
+              </a:spcBef>
+              <a:buFont typeface="Wingdings" pitchFamily="2" charset="2"/>
+              <a:buChar char="§"/>
+            </a:pPr>
+            <a:endParaRPr lang="en-US" sz="1800" dirty="0">
+              <a:latin typeface="Acumin Pro" panose="020B0504020202020204" pitchFamily="34" charset="77"/>
+            </a:endParaRPr>
+          </a:p>
+        </p:txBody>
+      </p:sp>
+      <p:sp>
+        <p:nvSpPr>
+          <p:cNvPr id="2" name="Text Placeholder 1">
+            <a:extLst>
+              <a:ext uri="{FF2B5EF4-FFF2-40B4-BE49-F238E27FC236}">
+                <a16:creationId xmlns:a16="http://schemas.microsoft.com/office/drawing/2014/main" id="{26EA9601-8CB6-7AE1-7657-928B7C8912AC}"/>
+              </a:ext>
+            </a:extLst>
+          </p:cNvPr>
+          <p:cNvSpPr>
+            <a:spLocks noGrp="1"/>
+          </p:cNvSpPr>
+          <p:nvPr>
+            <p:ph type="body" sz="quarter" idx="11"/>
+          </p:nvPr>
+        </p:nvSpPr>
+        <p:spPr>
+          <a:xfrm>
+            <a:off x="342900" y="954291"/>
+            <a:ext cx="8458200" cy="365760"/>
+          </a:xfrm>
+        </p:spPr>
+        <p:txBody>
+          <a:bodyPr vert="horz" lIns="91440" tIns="45720" rIns="91440" bIns="45720" rtlCol="0">
+            <a:normAutofit lnSpcReduction="10000"/>
+          </a:bodyPr>
+          <a:lstStyle/>
+          <a:p>
+            <a:r>
+              <a:rPr lang="en-US" dirty="0"/>
+              <a:t>React Framework (For iOS/Android/PMD Platform)</a:t>
+            </a:r>
+          </a:p>
+        </p:txBody>
+      </p:sp>
+      <p:sp>
+        <p:nvSpPr>
+          <p:cNvPr id="5" name="Footer Placeholder 4">
+            <a:extLst>
+              <a:ext uri="{FF2B5EF4-FFF2-40B4-BE49-F238E27FC236}">
+                <a16:creationId xmlns:a16="http://schemas.microsoft.com/office/drawing/2014/main" id="{205FCE67-C622-5DE6-DDAB-A210908DE4EA}"/>
+              </a:ext>
+            </a:extLst>
+          </p:cNvPr>
+          <p:cNvSpPr>
+            <a:spLocks noGrp="1"/>
+          </p:cNvSpPr>
+          <p:nvPr>
+            <p:ph type="ftr" sz="quarter" idx="14"/>
+          </p:nvPr>
+        </p:nvSpPr>
+        <p:spPr>
+          <a:xfrm>
+            <a:off x="7461174" y="6295058"/>
+            <a:ext cx="1339925" cy="323970"/>
+          </a:xfrm>
+        </p:spPr>
+        <p:txBody>
+          <a:bodyPr vert="horz" lIns="91440" tIns="45720" rIns="91440" bIns="45720" rtlCol="0" anchor="ctr">
+            <a:normAutofit/>
+          </a:bodyPr>
+          <a:lstStyle/>
+          <a:p>
+            <a:pPr algn="r">
+              <a:spcAft>
+                <a:spcPts val="600"/>
+              </a:spcAft>
+            </a:pPr>
+            <a:r>
+              <a:rPr lang="en-US" kern="1200">
+                <a:latin typeface="Acumin Pro" panose="020B0504020202020204" pitchFamily="34" charset="77"/>
+                <a:ea typeface="+mn-ea"/>
+                <a:cs typeface="+mn-cs"/>
+              </a:rPr>
+              <a:t>3/7</a:t>
+            </a:r>
+          </a:p>
+        </p:txBody>
+      </p:sp>
+      <p:sp>
+        <p:nvSpPr>
+          <p:cNvPr id="8" name="TextBox 7">
+            <a:extLst>
+              <a:ext uri="{FF2B5EF4-FFF2-40B4-BE49-F238E27FC236}">
+                <a16:creationId xmlns:a16="http://schemas.microsoft.com/office/drawing/2014/main" id="{E7203B45-D974-B9B8-AD38-7D500F40488E}"/>
+              </a:ext>
+            </a:extLst>
+          </p:cNvPr>
+          <p:cNvSpPr txBox="1"/>
+          <p:nvPr/>
+        </p:nvSpPr>
+        <p:spPr>
+          <a:xfrm>
+            <a:off x="334736" y="1305341"/>
+            <a:ext cx="8458199" cy="3970318"/>
+          </a:xfrm>
+          <a:prstGeom prst="rect">
+            <a:avLst/>
+          </a:prstGeom>
+          <a:noFill/>
+        </p:spPr>
+        <p:txBody>
+          <a:bodyPr wrap="square">
+            <a:spAutoFit/>
+          </a:bodyPr>
+          <a:lstStyle/>
+          <a:p>
+            <a:r>
+              <a:rPr lang="en-US" dirty="0"/>
+              <a:t>Expo / Expo Go:</a:t>
+            </a:r>
+          </a:p>
+          <a:p>
+            <a:pPr marL="285750" indent="-285750">
+              <a:buFont typeface="Arial" panose="020B0604020202020204" pitchFamily="34" charset="0"/>
+              <a:buChar char="•"/>
+            </a:pPr>
+            <a:r>
+              <a:rPr lang="en-US" dirty="0"/>
+              <a:t>Easiest cross-platform development for Android/iOS; development environment already released to App Store/Google Play Store</a:t>
+            </a:r>
+          </a:p>
+          <a:p>
+            <a:pPr marL="285750" indent="-285750">
+              <a:buFont typeface="Arial" panose="020B0604020202020204" pitchFamily="34" charset="0"/>
+              <a:buChar char="•"/>
+            </a:pPr>
+            <a:r>
+              <a:rPr lang="en-US" dirty="0"/>
+              <a:t>Ideal for quickly testing BLE/USB</a:t>
+            </a:r>
+          </a:p>
+          <a:p>
+            <a:pPr marL="285750" indent="-285750">
+              <a:buFont typeface="Arial" panose="020B0604020202020204" pitchFamily="34" charset="0"/>
+              <a:buChar char="•"/>
+            </a:pPr>
+            <a:r>
+              <a:rPr lang="en-US" dirty="0"/>
+              <a:t>Free, no cloud development is necessarily needed</a:t>
+            </a:r>
+          </a:p>
+          <a:p>
+            <a:r>
+              <a:rPr lang="en-US" dirty="0"/>
+              <a:t>React Native:</a:t>
+            </a:r>
+          </a:p>
+          <a:p>
+            <a:pPr marL="285750" indent="-285750">
+              <a:buFont typeface="Arial" panose="020B0604020202020204" pitchFamily="34" charset="0"/>
+              <a:buChar char="•"/>
+            </a:pPr>
+            <a:r>
+              <a:rPr lang="en-US" dirty="0"/>
+              <a:t>More customization, better performance a mobile device to obtain data</a:t>
+            </a:r>
+          </a:p>
+          <a:p>
+            <a:pPr marL="285750" indent="-285750">
+              <a:buFont typeface="Arial" panose="020B0604020202020204" pitchFamily="34" charset="0"/>
+              <a:buChar char="•"/>
+            </a:pPr>
+            <a:r>
+              <a:rPr lang="en-US" dirty="0"/>
+              <a:t>Allows integrating native modules if the Nicla requires low-level hardware communication</a:t>
+            </a:r>
+          </a:p>
+          <a:p>
+            <a:pPr marL="285750" indent="-285750">
+              <a:buFont typeface="Arial" panose="020B0604020202020204" pitchFamily="34" charset="0"/>
+              <a:buChar char="•"/>
+            </a:pPr>
+            <a:r>
+              <a:rPr lang="en-US" dirty="0"/>
+              <a:t>Free; No Apple Development account needed for our application</a:t>
+            </a:r>
+          </a:p>
+          <a:p>
+            <a:r>
+              <a:rPr lang="en-US" dirty="0"/>
+              <a:t>Pure React (Web App):</a:t>
+            </a:r>
+          </a:p>
+          <a:p>
+            <a:pPr marL="285750" indent="-285750">
+              <a:buFont typeface="Arial" panose="020B0604020202020204" pitchFamily="34" charset="0"/>
+              <a:buChar char="•"/>
+            </a:pPr>
+            <a:r>
+              <a:rPr lang="en-US" dirty="0"/>
+              <a:t>Suitable for desktop browser dashboards</a:t>
+            </a:r>
+          </a:p>
+          <a:p>
+            <a:pPr marL="285750" indent="-285750">
+              <a:buFont typeface="Arial" panose="020B0604020202020204" pitchFamily="34" charset="0"/>
+              <a:buChar char="•"/>
+            </a:pPr>
+            <a:r>
+              <a:rPr lang="en-US" dirty="0"/>
+              <a:t>Free; More development time required since all web development occurs on our backend</a:t>
+            </a:r>
+          </a:p>
+        </p:txBody>
+      </p:sp>
+    </p:spTree>
+    <p:extLst>
+      <p:ext uri="{BB962C8B-B14F-4D97-AF65-F5344CB8AC3E}">
+        <p14:creationId xmlns:p14="http://schemas.microsoft.com/office/powerpoint/2010/main" val="1804902107"/>
+      </p:ext>
+    </p:extLst>
+  </p:cSld>
+  <p:clrMapOvr>
+    <a:masterClrMapping/>
+  </p:clrMapOvr>
+</p:sld>
+</file>
+
+<file path=ppt/slides/slide8.xml><?xml version="1.0" encoding="utf-8"?>
 <p:sld xmlns:a="http://schemas.openxmlformats.org/drawingml/2006/main" xmlns:r="http://schemas.openxmlformats.org/officeDocument/2006/relationships" xmlns:p="http://schemas.openxmlformats.org/presentationml/2006/main">
   <p:cSld>
     <p:spTree>
@@ -14997,159 +16508,360 @@
           <a:chExt cx="0" cy="0"/>
         </a:xfrm>
       </p:grpSpPr>
+      <p:pic>
+        <p:nvPicPr>
+          <p:cNvPr id="7170" name="Picture 2" descr="Wheatstone Click">
+            <a:extLst>
+              <a:ext uri="{FF2B5EF4-FFF2-40B4-BE49-F238E27FC236}">
+                <a16:creationId xmlns:a16="http://schemas.microsoft.com/office/drawing/2014/main" id="{9C2AEDD3-4C7A-90EA-ACD2-06B5E26ED5E9}"/>
+              </a:ext>
+            </a:extLst>
+          </p:cNvPr>
+          <p:cNvPicPr>
+            <a:picLocks noChangeAspect="1" noChangeArrowheads="1"/>
+          </p:cNvPicPr>
+          <p:nvPr/>
+        </p:nvPicPr>
+        <p:blipFill>
+          <a:blip r:embed="rId2">
+            <a:extLst>
+              <a:ext uri="{28A0092B-C50C-407E-A947-70E740481C1C}">
+                <a14:useLocalDpi xmlns:a14="http://schemas.microsoft.com/office/drawing/2010/main" val="0"/>
+              </a:ext>
+            </a:extLst>
+          </a:blip>
+          <a:srcRect l="4903"/>
+          <a:stretch>
+            <a:fillRect/>
+          </a:stretch>
+        </p:blipFill>
+        <p:spPr bwMode="auto">
+          <a:xfrm>
+            <a:off x="4891490" y="1643074"/>
+            <a:ext cx="3909610" cy="2055591"/>
+          </a:xfrm>
+          <a:prstGeom prst="rect">
+            <a:avLst/>
+          </a:prstGeom>
+          <a:solidFill>
+            <a:srgbClr val="FFFFFF"/>
+          </a:solidFill>
+          <a:extLst>
+            <a:ext uri="{909E8E84-426E-40DD-AFC4-6F175D3DCCD1}">
+              <a14:hiddenFill xmlns:a14="http://schemas.microsoft.com/office/drawing/2010/main">
+                <a:solidFill>
+                  <a:srgbClr val="FFFFFF"/>
+                </a:solidFill>
+              </a14:hiddenFill>
+            </a:ext>
+          </a:extLst>
+        </p:spPr>
+      </p:pic>
+      <p:sp>
+        <p:nvSpPr>
+          <p:cNvPr id="4" name="Title 3">
+            <a:extLst>
+              <a:ext uri="{FF2B5EF4-FFF2-40B4-BE49-F238E27FC236}">
+                <a16:creationId xmlns:a16="http://schemas.microsoft.com/office/drawing/2014/main" id="{4DBD499B-FCC9-7845-E58F-DD768F9308F7}"/>
+              </a:ext>
+            </a:extLst>
+          </p:cNvPr>
+          <p:cNvSpPr>
+            <a:spLocks noGrp="1"/>
+          </p:cNvSpPr>
+          <p:nvPr>
+            <p:ph type="title"/>
+          </p:nvPr>
+        </p:nvSpPr>
+        <p:spPr>
+          <a:xfrm>
+            <a:off x="351064" y="385004"/>
+            <a:ext cx="8450036" cy="589032"/>
+          </a:xfrm>
+        </p:spPr>
+        <p:txBody>
+          <a:bodyPr vert="horz" lIns="91440" tIns="45720" rIns="91440" bIns="45720" rtlCol="0" anchor="ctr">
+            <a:normAutofit/>
+          </a:bodyPr>
+          <a:lstStyle/>
+          <a:p>
+            <a:r>
+              <a:rPr lang="en-US" b="1" i="1" kern="1200" cap="none" baseline="0">
+                <a:latin typeface="Acumin Pro Condensed Semibold" panose="020B0506020202020204" pitchFamily="34" charset="77"/>
+                <a:ea typeface="+mj-ea"/>
+                <a:cs typeface="+mj-cs"/>
+              </a:rPr>
+              <a:t>Rework of Wheatstone Bridge</a:t>
+            </a:r>
+          </a:p>
+        </p:txBody>
+      </p:sp>
+      <p:pic>
+        <p:nvPicPr>
+          <p:cNvPr id="7172" name="Picture 4" descr="Wheatstone Bridge">
+            <a:extLst>
+              <a:ext uri="{FF2B5EF4-FFF2-40B4-BE49-F238E27FC236}">
+                <a16:creationId xmlns:a16="http://schemas.microsoft.com/office/drawing/2014/main" id="{88F1906B-33E0-CA86-DB4D-AC23C23897D8}"/>
+              </a:ext>
+            </a:extLst>
+          </p:cNvPr>
+          <p:cNvPicPr>
+            <a:picLocks noChangeAspect="1" noChangeArrowheads="1"/>
+          </p:cNvPicPr>
+          <p:nvPr/>
+        </p:nvPicPr>
+        <p:blipFill>
+          <a:blip r:embed="rId3">
+            <a:extLst>
+              <a:ext uri="{28A0092B-C50C-407E-A947-70E740481C1C}">
+                <a14:useLocalDpi xmlns:a14="http://schemas.microsoft.com/office/drawing/2010/main" val="0"/>
+              </a:ext>
+            </a:extLst>
+          </a:blip>
+          <a:srcRect t="10649" b="16071"/>
+          <a:stretch>
+            <a:fillRect/>
+          </a:stretch>
+        </p:blipFill>
+        <p:spPr bwMode="auto">
+          <a:xfrm>
+            <a:off x="4891490" y="3884038"/>
+            <a:ext cx="3909610" cy="2055591"/>
+          </a:xfrm>
+          <a:prstGeom prst="rect">
+            <a:avLst/>
+          </a:prstGeom>
+          <a:solidFill>
+            <a:srgbClr val="FFFFFF"/>
+          </a:solidFill>
+          <a:extLst>
+            <a:ext uri="{909E8E84-426E-40DD-AFC4-6F175D3DCCD1}">
+              <a14:hiddenFill xmlns:a14="http://schemas.microsoft.com/office/drawing/2010/main">
+                <a:solidFill>
+                  <a:srgbClr val="FFFFFF"/>
+                </a:solidFill>
+              </a14:hiddenFill>
+            </a:ext>
+          </a:extLst>
+        </p:spPr>
+      </p:pic>
       <p:sp>
         <p:nvSpPr>
           <p:cNvPr id="2" name="Text Placeholder 1">
             <a:extLst>
               <a:ext uri="{FF2B5EF4-FFF2-40B4-BE49-F238E27FC236}">
-                <a16:creationId xmlns:a16="http://schemas.microsoft.com/office/drawing/2014/main" id="{11B29CAD-3B43-3BC0-D2EC-A53874ABB884}"/>
-              </a:ext>
-            </a:extLst>
-          </p:cNvPr>
-          <p:cNvSpPr>
-            <a:spLocks noGrp="1"/>
-          </p:cNvSpPr>
-          <p:nvPr>
-            <p:ph type="body" sz="quarter" idx="11"/>
-          </p:nvPr>
-        </p:nvSpPr>
-        <p:spPr/>
+                <a16:creationId xmlns:a16="http://schemas.microsoft.com/office/drawing/2014/main" id="{6F39A0ED-50CB-B930-DF2F-ED2ADAB796E8}"/>
+              </a:ext>
+            </a:extLst>
+          </p:cNvPr>
+          <p:cNvSpPr>
+            <a:spLocks noGrp="1"/>
+          </p:cNvSpPr>
+          <p:nvPr>
+            <p:ph type="body" sz="quarter" idx="15"/>
+          </p:nvPr>
+        </p:nvSpPr>
+        <p:spPr>
+          <a:xfrm>
+            <a:off x="342900" y="954291"/>
+            <a:ext cx="8458200" cy="365760"/>
+          </a:xfrm>
+        </p:spPr>
+        <p:txBody>
+          <a:bodyPr vert="horz" lIns="91440" tIns="45720" rIns="91440" bIns="45720" rtlCol="0">
+            <a:normAutofit lnSpcReduction="10000"/>
+          </a:bodyPr>
+          <a:lstStyle/>
+          <a:p>
+            <a:r>
+              <a:rPr lang="en-US" b="1" i="0" kern="1200" baseline="0">
+                <a:latin typeface="Acumin Pro Condensed Semibold" panose="020B0506020202020204" pitchFamily="34" charset="77"/>
+                <a:ea typeface="+mn-ea"/>
+                <a:cs typeface="+mn-cs"/>
+              </a:rPr>
+              <a:t>SMD components would likely be preferable over a chip design</a:t>
+            </a:r>
+          </a:p>
+        </p:txBody>
+      </p:sp>
+      <p:sp>
+        <p:nvSpPr>
+          <p:cNvPr id="6" name="TextBox 5">
+            <a:extLst>
+              <a:ext uri="{FF2B5EF4-FFF2-40B4-BE49-F238E27FC236}">
+                <a16:creationId xmlns:a16="http://schemas.microsoft.com/office/drawing/2014/main" id="{2F06ECD7-2A71-ED98-95E9-788EF5685DF1}"/>
+              </a:ext>
+            </a:extLst>
+          </p:cNvPr>
+          <p:cNvSpPr txBox="1"/>
+          <p:nvPr/>
+        </p:nvSpPr>
+        <p:spPr>
+          <a:xfrm>
+            <a:off x="334737" y="1643074"/>
+            <a:ext cx="4308874" cy="4307571"/>
+          </a:xfrm>
+          <a:prstGeom prst="rect">
+            <a:avLst/>
+          </a:prstGeom>
+        </p:spPr>
+        <p:txBody>
+          <a:bodyPr vert="horz" lIns="91440" tIns="45720" rIns="91440" bIns="45720" rtlCol="0">
+            <a:normAutofit/>
+          </a:bodyPr>
+          <a:lstStyle/>
+          <a:p>
+            <a:pPr marL="171450" indent="-171450" defTabSz="685800">
+              <a:lnSpc>
+                <a:spcPct val="90000"/>
+              </a:lnSpc>
+              <a:spcBef>
+                <a:spcPts val="750"/>
+              </a:spcBef>
+              <a:buFont typeface="Wingdings" pitchFamily="2" charset="2"/>
+              <a:buChar char="§"/>
+            </a:pPr>
+            <a:r>
+              <a:rPr lang="en-US">
+                <a:latin typeface="Acumin Pro" panose="020B0504020202020204" pitchFamily="34" charset="77"/>
+              </a:rPr>
+              <a:t>Used Professor Salas’ feedback</a:t>
+            </a:r>
+          </a:p>
+          <a:p>
+            <a:pPr marL="171450" indent="-171450" defTabSz="685800">
+              <a:lnSpc>
+                <a:spcPct val="90000"/>
+              </a:lnSpc>
+              <a:spcBef>
+                <a:spcPts val="750"/>
+              </a:spcBef>
+              <a:buFont typeface="Wingdings" pitchFamily="2" charset="2"/>
+              <a:buChar char="§"/>
+            </a:pPr>
+            <a:r>
+              <a:rPr lang="en-US">
+                <a:latin typeface="Acumin Pro" panose="020B0504020202020204" pitchFamily="34" charset="77"/>
+              </a:rPr>
+              <a:t>INA333 used better as an amplifier for Wheatstone bridges’ output</a:t>
+            </a:r>
+          </a:p>
+          <a:p>
+            <a:pPr marL="171450" indent="-171450" defTabSz="685800">
+              <a:lnSpc>
+                <a:spcPct val="90000"/>
+              </a:lnSpc>
+              <a:spcBef>
+                <a:spcPts val="750"/>
+              </a:spcBef>
+              <a:buFont typeface="Wingdings" pitchFamily="2" charset="2"/>
+              <a:buChar char="§"/>
+            </a:pPr>
+            <a:r>
+              <a:rPr lang="en-US">
+                <a:latin typeface="Acumin Pro" panose="020B0504020202020204" pitchFamily="34" charset="77"/>
+              </a:rPr>
+              <a:t>SMD components would likely form a better Wheatstone bridge</a:t>
+            </a:r>
+          </a:p>
+        </p:txBody>
+      </p:sp>
+      <p:sp>
+        <p:nvSpPr>
+          <p:cNvPr id="7177" name="Text Placeholder 6">
+            <a:extLst>
+              <a:ext uri="{FF2B5EF4-FFF2-40B4-BE49-F238E27FC236}">
+                <a16:creationId xmlns:a16="http://schemas.microsoft.com/office/drawing/2014/main" id="{BD9A1836-9647-F246-5862-65D16AE53DDC}"/>
+              </a:ext>
+            </a:extLst>
+          </p:cNvPr>
+          <p:cNvSpPr>
+            <a:spLocks noGrp="1"/>
+          </p:cNvSpPr>
+          <p:nvPr>
+            <p:ph type="body" sz="half" idx="2"/>
+          </p:nvPr>
+        </p:nvSpPr>
+        <p:spPr>
+          <a:xfrm>
+            <a:off x="4891295" y="3395950"/>
+            <a:ext cx="3909707" cy="302715"/>
+          </a:xfrm>
+        </p:spPr>
         <p:txBody>
           <a:bodyPr/>
           <a:lstStyle/>
           <a:p>
-            <a:r>
-              <a:rPr lang="en-US" dirty="0"/>
-              <a:t>Blockers &amp; Next Week’s Work</a:t>
-            </a:r>
-          </a:p>
-        </p:txBody>
-      </p:sp>
-      <p:sp>
-        <p:nvSpPr>
-          <p:cNvPr id="3" name="Text Placeholder 2">
-            <a:extLst>
-              <a:ext uri="{FF2B5EF4-FFF2-40B4-BE49-F238E27FC236}">
-                <a16:creationId xmlns:a16="http://schemas.microsoft.com/office/drawing/2014/main" id="{A9F87380-04A3-DD16-EAB3-0921830BDF50}"/>
-              </a:ext>
-            </a:extLst>
-          </p:cNvPr>
-          <p:cNvSpPr>
-            <a:spLocks noGrp="1"/>
-          </p:cNvSpPr>
-          <p:nvPr>
-            <p:ph type="body" sz="quarter" idx="10"/>
-          </p:nvPr>
-        </p:nvSpPr>
-        <p:spPr/>
+            <a:endParaRPr lang="en-US"/>
+          </a:p>
+        </p:txBody>
+      </p:sp>
+      <p:sp>
+        <p:nvSpPr>
+          <p:cNvPr id="7179" name="Text Placeholder 7">
+            <a:extLst>
+              <a:ext uri="{FF2B5EF4-FFF2-40B4-BE49-F238E27FC236}">
+                <a16:creationId xmlns:a16="http://schemas.microsoft.com/office/drawing/2014/main" id="{03F53B41-17D9-AC91-2B03-A07D851EDB14}"/>
+              </a:ext>
+            </a:extLst>
+          </p:cNvPr>
+          <p:cNvSpPr>
+            <a:spLocks noGrp="1"/>
+          </p:cNvSpPr>
+          <p:nvPr>
+            <p:ph type="body" sz="half" idx="19"/>
+          </p:nvPr>
+        </p:nvSpPr>
+        <p:spPr>
+          <a:xfrm>
+            <a:off x="4891295" y="5636914"/>
+            <a:ext cx="3909610" cy="302715"/>
+          </a:xfrm>
+        </p:spPr>
         <p:txBody>
           <a:bodyPr/>
           <a:lstStyle/>
           <a:p>
-            <a:pPr marL="285750" indent="-285750">
-              <a:buFont typeface="Arial" panose="020B0604020202020204" pitchFamily="34" charset="0"/>
-              <a:buChar char="•"/>
+            <a:endParaRPr lang="en-US"/>
+          </a:p>
+        </p:txBody>
+      </p:sp>
+      <p:sp>
+        <p:nvSpPr>
+          <p:cNvPr id="5" name="Footer Placeholder 4">
+            <a:extLst>
+              <a:ext uri="{FF2B5EF4-FFF2-40B4-BE49-F238E27FC236}">
+                <a16:creationId xmlns:a16="http://schemas.microsoft.com/office/drawing/2014/main" id="{D1A9D226-040A-4596-7F7C-BFBBE6AC2F67}"/>
+              </a:ext>
+            </a:extLst>
+          </p:cNvPr>
+          <p:cNvSpPr>
+            <a:spLocks noGrp="1"/>
+          </p:cNvSpPr>
+          <p:nvPr>
+            <p:ph type="ftr" sz="quarter" idx="20"/>
+          </p:nvPr>
+        </p:nvSpPr>
+        <p:spPr>
+          <a:xfrm>
+            <a:off x="7461174" y="6295058"/>
+            <a:ext cx="1339925" cy="323970"/>
+          </a:xfrm>
+        </p:spPr>
+        <p:txBody>
+          <a:bodyPr vert="horz" lIns="91440" tIns="45720" rIns="91440" bIns="45720" rtlCol="0" anchor="ctr">
+            <a:normAutofit/>
+          </a:bodyPr>
+          <a:lstStyle/>
+          <a:p>
+            <a:pPr algn="r">
+              <a:spcAft>
+                <a:spcPts val="600"/>
+              </a:spcAft>
             </a:pPr>
             <a:r>
-              <a:rPr lang="en-US" dirty="0"/>
-              <a:t>Item 1</a:t>
-            </a:r>
-          </a:p>
-          <a:p>
-            <a:pPr marL="285750" indent="-285750">
-              <a:buFont typeface="Arial" panose="020B0604020202020204" pitchFamily="34" charset="0"/>
-              <a:buChar char="•"/>
-            </a:pPr>
-            <a:r>
-              <a:rPr lang="en-US" dirty="0"/>
-              <a:t>Item 2</a:t>
-            </a:r>
-          </a:p>
-          <a:p>
-            <a:pPr marL="628650" lvl="1" indent="-285750">
-              <a:buFont typeface="Arial" panose="020B0604020202020204" pitchFamily="34" charset="0"/>
-              <a:buChar char="•"/>
-            </a:pPr>
-            <a:endParaRPr lang="en-US" dirty="0"/>
-          </a:p>
-          <a:p>
-            <a:pPr marL="285750" indent="-285750">
-              <a:buFont typeface="Arial" panose="020B0604020202020204" pitchFamily="34" charset="0"/>
-              <a:buChar char="•"/>
-            </a:pPr>
-            <a:endParaRPr lang="en-US" dirty="0"/>
-          </a:p>
-          <a:p>
-            <a:r>
-              <a:rPr lang="en-US" dirty="0"/>
-              <a:t>Blockers:</a:t>
-            </a:r>
-          </a:p>
-          <a:p>
-            <a:pPr marL="285750" indent="-285750">
-              <a:buFont typeface="Arial" panose="020B0604020202020204" pitchFamily="34" charset="0"/>
-              <a:buChar char="•"/>
-            </a:pPr>
-            <a:r>
-              <a:rPr lang="en-US" dirty="0"/>
-              <a:t>Heavy traffic for JLCPCB around this season</a:t>
-            </a:r>
-          </a:p>
-        </p:txBody>
-      </p:sp>
-      <p:sp>
-        <p:nvSpPr>
-          <p:cNvPr id="4" name="Title 3">
-            <a:extLst>
-              <a:ext uri="{FF2B5EF4-FFF2-40B4-BE49-F238E27FC236}">
-                <a16:creationId xmlns:a16="http://schemas.microsoft.com/office/drawing/2014/main" id="{47D02411-52BC-0A6C-B958-234593BB194F}"/>
-              </a:ext>
-            </a:extLst>
-          </p:cNvPr>
-          <p:cNvSpPr>
-            <a:spLocks noGrp="1"/>
-          </p:cNvSpPr>
-          <p:nvPr>
-            <p:ph type="title"/>
-          </p:nvPr>
-        </p:nvSpPr>
-        <p:spPr/>
-        <p:txBody>
-          <a:bodyPr/>
-          <a:lstStyle/>
-          <a:p>
-            <a:r>
-              <a:rPr lang="en-US" dirty="0"/>
-              <a:t>Next Week</a:t>
-            </a:r>
-          </a:p>
-        </p:txBody>
-      </p:sp>
-      <p:sp>
-        <p:nvSpPr>
-          <p:cNvPr id="5" name="Footer Placeholder 4">
-            <a:extLst>
-              <a:ext uri="{FF2B5EF4-FFF2-40B4-BE49-F238E27FC236}">
-                <a16:creationId xmlns:a16="http://schemas.microsoft.com/office/drawing/2014/main" id="{51BAB307-58AA-C3F2-0BBB-500351B01F7A}"/>
-              </a:ext>
-            </a:extLst>
-          </p:cNvPr>
-          <p:cNvSpPr>
-            <a:spLocks noGrp="1"/>
-          </p:cNvSpPr>
-          <p:nvPr>
-            <p:ph type="ftr" sz="quarter" idx="12"/>
-          </p:nvPr>
-        </p:nvSpPr>
-        <p:spPr/>
-        <p:txBody>
-          <a:bodyPr/>
-          <a:lstStyle/>
-          <a:p>
-            <a:pPr algn="r"/>
-            <a:r>
-              <a:rPr lang="en-US" dirty="0"/>
-              <a:t>6/7</a:t>
+              <a:rPr lang="en-US"/>
+              <a:t>3/31/23            ‹#›</a:t>
             </a:r>
           </a:p>
         </p:txBody>
@@ -15157,7 +16869,7 @@
     </p:spTree>
     <p:extLst>
       <p:ext uri="{BB962C8B-B14F-4D97-AF65-F5344CB8AC3E}">
-        <p14:creationId xmlns:p14="http://schemas.microsoft.com/office/powerpoint/2010/main" val="257444251"/>
+        <p14:creationId xmlns:p14="http://schemas.microsoft.com/office/powerpoint/2010/main" val="2230972694"/>
       </p:ext>
     </p:extLst>
   </p:cSld>
@@ -15167,7 +16879,7 @@
 </p:sld>
 </file>
 
-<file path=ppt/slides/slide7.xml><?xml version="1.0" encoding="utf-8"?>
+<file path=ppt/slides/slide9.xml><?xml version="1.0" encoding="utf-8"?>
 <p:sld xmlns:a="http://schemas.openxmlformats.org/drawingml/2006/main" xmlns:r="http://schemas.openxmlformats.org/officeDocument/2006/relationships" xmlns:p="http://schemas.openxmlformats.org/presentationml/2006/main">
   <p:cSld>
     <p:spTree>
@@ -15186,18 +16898,18 @@
       </p:grpSpPr>
       <p:sp>
         <p:nvSpPr>
-          <p:cNvPr id="2" name="Title 1">
-            <a:extLst>
-              <a:ext uri="{FF2B5EF4-FFF2-40B4-BE49-F238E27FC236}">
-                <a16:creationId xmlns:a16="http://schemas.microsoft.com/office/drawing/2014/main" id="{E4E72CBA-026F-7E96-546F-23B8813A83DA}"/>
-              </a:ext>
-            </a:extLst>
-          </p:cNvPr>
-          <p:cNvSpPr>
-            <a:spLocks noGrp="1"/>
-          </p:cNvSpPr>
-          <p:nvPr>
-            <p:ph type="title"/>
+          <p:cNvPr id="2" name="Text Placeholder 1">
+            <a:extLst>
+              <a:ext uri="{FF2B5EF4-FFF2-40B4-BE49-F238E27FC236}">
+                <a16:creationId xmlns:a16="http://schemas.microsoft.com/office/drawing/2014/main" id="{D7047720-B4F1-8AE7-59E1-1FCC0086B047}"/>
+              </a:ext>
+            </a:extLst>
+          </p:cNvPr>
+          <p:cNvSpPr>
+            <a:spLocks noGrp="1"/>
+          </p:cNvSpPr>
+          <p:nvPr>
+            <p:ph type="body" sz="quarter" idx="11"/>
           </p:nvPr>
         </p:nvSpPr>
         <p:spPr/>
@@ -15207,7 +16919,7 @@
           <a:p>
             <a:r>
               <a:rPr lang="en-US" dirty="0"/>
-              <a:t>Thank You</a:t>
+              <a:t>Showed Executable App, got data working on remote device</a:t>
             </a:r>
           </a:p>
         </p:txBody>
@@ -15217,7 +16929,7 @@
           <p:cNvPr id="3" name="Text Placeholder 2">
             <a:extLst>
               <a:ext uri="{FF2B5EF4-FFF2-40B4-BE49-F238E27FC236}">
-                <a16:creationId xmlns:a16="http://schemas.microsoft.com/office/drawing/2014/main" id="{CE8FBDCD-BC38-D4A8-A210-EA02F2610057}"/>
+                <a16:creationId xmlns:a16="http://schemas.microsoft.com/office/drawing/2014/main" id="{2DDF7CC9-E45B-5BE8-9BC9-DB82CB187F20}"/>
               </a:ext>
             </a:extLst>
           </p:cNvPr>
@@ -15230,22 +16942,121 @@
         </p:nvSpPr>
         <p:spPr/>
         <p:txBody>
+          <a:bodyPr/>
+          <a:lstStyle/>
+          <a:p>
+            <a:pPr marL="285750" indent="-285750">
+              <a:buFont typeface="Arial" panose="020B0604020202020204" pitchFamily="34" charset="0"/>
+              <a:buChar char="•"/>
+            </a:pPr>
+            <a:r>
+              <a:rPr lang="en-US" dirty="0"/>
+              <a:t>Backpack maybe too small for the Battery + Device (Initial Concern)</a:t>
+            </a:r>
+          </a:p>
+          <a:p>
+            <a:pPr marL="285750" indent="-285750">
+              <a:buFont typeface="Arial" panose="020B0604020202020204" pitchFamily="34" charset="0"/>
+              <a:buChar char="•"/>
+            </a:pPr>
+            <a:r>
+              <a:rPr lang="en-US" dirty="0"/>
+              <a:t>Showed Agriculture Department that the remote app could be compiled</a:t>
+            </a:r>
+          </a:p>
+          <a:p>
+            <a:pPr marL="628650" lvl="1" indent="-285750">
+              <a:buFont typeface="Arial" panose="020B0604020202020204" pitchFamily="34" charset="0"/>
+              <a:buChar char="•"/>
+            </a:pPr>
+            <a:r>
+              <a:rPr lang="en-US" dirty="0"/>
+              <a:t>Data collection show take place 12/15 to obtain real data from chickens</a:t>
+            </a:r>
+          </a:p>
+          <a:p>
+            <a:pPr marL="628650" lvl="1" indent="-285750">
+              <a:buFont typeface="Arial" panose="020B0604020202020204" pitchFamily="34" charset="0"/>
+              <a:buChar char="•"/>
+            </a:pPr>
+            <a:r>
+              <a:rPr lang="en-US" dirty="0"/>
+              <a:t>Remote BLE, Battery, Website all work seamlessly</a:t>
+            </a:r>
+          </a:p>
+          <a:p>
+            <a:pPr marL="285750" indent="-285750">
+              <a:buFont typeface="Arial" panose="020B0604020202020204" pitchFamily="34" charset="0"/>
+              <a:buChar char="•"/>
+            </a:pPr>
+            <a:endParaRPr lang="en-US" dirty="0"/>
+          </a:p>
+        </p:txBody>
+      </p:sp>
+      <p:sp>
+        <p:nvSpPr>
+          <p:cNvPr id="4" name="Title 3">
+            <a:extLst>
+              <a:ext uri="{FF2B5EF4-FFF2-40B4-BE49-F238E27FC236}">
+                <a16:creationId xmlns:a16="http://schemas.microsoft.com/office/drawing/2014/main" id="{9EC1189A-F0E2-E37C-798C-AAD09554DA79}"/>
+              </a:ext>
+            </a:extLst>
+          </p:cNvPr>
+          <p:cNvSpPr>
+            <a:spLocks noGrp="1"/>
+          </p:cNvSpPr>
+          <p:nvPr>
+            <p:ph type="title"/>
+          </p:nvPr>
+        </p:nvSpPr>
+        <p:spPr/>
+        <p:txBody>
           <a:bodyPr>
-            <a:normAutofit/>
+            <a:normAutofit fontScale="90000"/>
           </a:bodyPr>
           <a:lstStyle/>
           <a:p>
             <a:r>
               <a:rPr lang="en-US" dirty="0"/>
-              <a:t>Purdue Polytechnic Institute</a:t>
-            </a:r>
+              <a:t>Delivery of Device for Data Logging to the Agriculture</a:t>
+            </a:r>
+          </a:p>
+        </p:txBody>
+      </p:sp>
+      <p:sp>
+        <p:nvSpPr>
+          <p:cNvPr id="5" name="Footer Placeholder 4">
+            <a:extLst>
+              <a:ext uri="{FF2B5EF4-FFF2-40B4-BE49-F238E27FC236}">
+                <a16:creationId xmlns:a16="http://schemas.microsoft.com/office/drawing/2014/main" id="{DA1813EC-8D23-E168-9E25-E6CA95E2F0D4}"/>
+              </a:ext>
+            </a:extLst>
+          </p:cNvPr>
+          <p:cNvSpPr>
+            <a:spLocks noGrp="1"/>
+          </p:cNvSpPr>
+          <p:nvPr>
+            <p:ph type="ftr" sz="quarter" idx="12"/>
+          </p:nvPr>
+        </p:nvSpPr>
+        <p:spPr/>
+        <p:txBody>
+          <a:bodyPr/>
+          <a:lstStyle/>
+          <a:p>
+            <a:pPr algn="r"/>
+            <a:r>
+              <a:rPr lang="en-US"/>
+              <a:t>3/31/23            ‹#›</a:t>
+            </a:r>
+            <a:endParaRPr lang="en-US" dirty="0"/>
           </a:p>
         </p:txBody>
       </p:sp>
     </p:spTree>
     <p:extLst>
       <p:ext uri="{BB962C8B-B14F-4D97-AF65-F5344CB8AC3E}">
-        <p14:creationId xmlns:p14="http://schemas.microsoft.com/office/powerpoint/2010/main" val="3555266232"/>
+        <p14:creationId xmlns:p14="http://schemas.microsoft.com/office/powerpoint/2010/main" val="3064732277"/>
       </p:ext>
     </p:extLst>
   </p:cSld>
@@ -15838,12 +17649,46 @@
 </file>
 
 <file path=customXml/item1.xml><?xml version="1.0" encoding="utf-8"?>
-<?mso-contentType ?>
-<FormTemplates xmlns="http://schemas.microsoft.com/sharepoint/v3/contenttype/forms">
-  <Display>DocumentLibraryForm</Display>
-  <Edit>DocumentLibraryForm</Edit>
-  <New>DocumentLibraryForm</New>
-</FormTemplates>
+<p:properties xmlns:p="http://schemas.microsoft.com/office/2006/metadata/properties" xmlns:xsi="http://www.w3.org/2001/XMLSchema-instance" xmlns:pc="http://schemas.microsoft.com/office/infopath/2007/PartnerControls">
+  <documentManagement>
+    <SharedWithUsers xmlns="d6656b4d-3fa0-4709-acfb-d5e813445d1e">
+      <UserInfo>
+        <DisplayName>Schott, Thomas H.</DisplayName>
+        <AccountId>17</AccountId>
+        <AccountType/>
+      </UserInfo>
+      <UserInfo>
+        <DisplayName>Sarault, Olivia M</DisplayName>
+        <AccountId>29</AccountId>
+        <AccountType/>
+      </UserInfo>
+      <UserInfo>
+        <DisplayName>Hiller, Kelly R</DisplayName>
+        <AccountId>98</AccountId>
+        <AccountType/>
+      </UserInfo>
+      <UserInfo>
+        <DisplayName>Eddy, Abigail Ellen</DisplayName>
+        <AccountId>46</AccountId>
+        <AccountType/>
+      </UserInfo>
+      <UserInfo>
+        <DisplayName>Gu, Yu Rain</DisplayName>
+        <AccountId>77</AccountId>
+        <AccountType/>
+      </UserInfo>
+      <UserInfo>
+        <DisplayName>Reese, Kristy S</DisplayName>
+        <AccountId>26</AccountId>
+        <AccountType/>
+      </UserInfo>
+    </SharedWithUsers>
+    <lcf76f155ced4ddcb4097134ff3c332f xmlns="37af3f4b-4b66-46f9-8456-831d9bc3e737">
+      <Terms xmlns="http://schemas.microsoft.com/office/infopath/2007/PartnerControls"/>
+    </lcf76f155ced4ddcb4097134ff3c332f>
+    <TaxCatchAll xmlns="d6656b4d-3fa0-4709-acfb-d5e813445d1e" xsi:nil="true"/>
+  </documentManagement>
+</p:properties>
 </file>
 
 <file path=customXml/item2.xml><?xml version="1.0" encoding="utf-8"?>
@@ -16070,52 +17915,27 @@
 </file>
 
 <file path=customXml/item3.xml><?xml version="1.0" encoding="utf-8"?>
-<p:properties xmlns:p="http://schemas.microsoft.com/office/2006/metadata/properties" xmlns:xsi="http://www.w3.org/2001/XMLSchema-instance" xmlns:pc="http://schemas.microsoft.com/office/infopath/2007/PartnerControls">
-  <documentManagement>
-    <SharedWithUsers xmlns="d6656b4d-3fa0-4709-acfb-d5e813445d1e">
-      <UserInfo>
-        <DisplayName>Schott, Thomas H.</DisplayName>
-        <AccountId>17</AccountId>
-        <AccountType/>
-      </UserInfo>
-      <UserInfo>
-        <DisplayName>Sarault, Olivia M</DisplayName>
-        <AccountId>29</AccountId>
-        <AccountType/>
-      </UserInfo>
-      <UserInfo>
-        <DisplayName>Hiller, Kelly R</DisplayName>
-        <AccountId>98</AccountId>
-        <AccountType/>
-      </UserInfo>
-      <UserInfo>
-        <DisplayName>Eddy, Abigail Ellen</DisplayName>
-        <AccountId>46</AccountId>
-        <AccountType/>
-      </UserInfo>
-      <UserInfo>
-        <DisplayName>Gu, Yu Rain</DisplayName>
-        <AccountId>77</AccountId>
-        <AccountType/>
-      </UserInfo>
-      <UserInfo>
-        <DisplayName>Reese, Kristy S</DisplayName>
-        <AccountId>26</AccountId>
-        <AccountType/>
-      </UserInfo>
-    </SharedWithUsers>
-    <lcf76f155ced4ddcb4097134ff3c332f xmlns="37af3f4b-4b66-46f9-8456-831d9bc3e737">
-      <Terms xmlns="http://schemas.microsoft.com/office/infopath/2007/PartnerControls"/>
-    </lcf76f155ced4ddcb4097134ff3c332f>
-    <TaxCatchAll xmlns="d6656b4d-3fa0-4709-acfb-d5e813445d1e" xsi:nil="true"/>
-  </documentManagement>
-</p:properties>
+<?mso-contentType ?>
+<FormTemplates xmlns="http://schemas.microsoft.com/sharepoint/v3/contenttype/forms">
+  <Display>DocumentLibraryForm</Display>
+  <Edit>DocumentLibraryForm</Edit>
+  <New>DocumentLibraryForm</New>
+</FormTemplates>
 </file>
 
 <file path=customXml/itemProps1.xml><?xml version="1.0" encoding="utf-8"?>
-<ds:datastoreItem xmlns:ds="http://schemas.openxmlformats.org/officeDocument/2006/customXml" ds:itemID="{F5B64EEB-1B4A-4920-AA44-E234D7D487D1}">
+<ds:datastoreItem xmlns:ds="http://schemas.openxmlformats.org/officeDocument/2006/customXml" ds:itemID="{21DE0D6C-581B-4814-98E7-EF172D5D46A1}">
   <ds:schemaRefs>
-    <ds:schemaRef ds:uri="http://schemas.microsoft.com/sharepoint/v3/contenttype/forms"/>
+    <ds:schemaRef ds:uri="http://purl.org/dc/elements/1.1/"/>
+    <ds:schemaRef ds:uri="http://schemas.microsoft.com/office/2006/documentManagement/types"/>
+    <ds:schemaRef ds:uri="d6656b4d-3fa0-4709-acfb-d5e813445d1e"/>
+    <ds:schemaRef ds:uri="http://purl.org/dc/terms/"/>
+    <ds:schemaRef ds:uri="http://schemas.microsoft.com/office/infopath/2007/PartnerControls"/>
+    <ds:schemaRef ds:uri="37af3f4b-4b66-46f9-8456-831d9bc3e737"/>
+    <ds:schemaRef ds:uri="http://schemas.openxmlformats.org/package/2006/metadata/core-properties"/>
+    <ds:schemaRef ds:uri="http://schemas.microsoft.com/office/2006/metadata/properties"/>
+    <ds:schemaRef ds:uri="http://www.w3.org/XML/1998/namespace"/>
+    <ds:schemaRef ds:uri="http://purl.org/dc/dcmitype/"/>
   </ds:schemaRefs>
 </ds:datastoreItem>
 </file>
@@ -16140,18 +17960,9 @@
 </file>
 
 <file path=customXml/itemProps3.xml><?xml version="1.0" encoding="utf-8"?>
-<ds:datastoreItem xmlns:ds="http://schemas.openxmlformats.org/officeDocument/2006/customXml" ds:itemID="{21DE0D6C-581B-4814-98E7-EF172D5D46A1}">
+<ds:datastoreItem xmlns:ds="http://schemas.openxmlformats.org/officeDocument/2006/customXml" ds:itemID="{F5B64EEB-1B4A-4920-AA44-E234D7D487D1}">
   <ds:schemaRefs>
-    <ds:schemaRef ds:uri="http://purl.org/dc/elements/1.1/"/>
-    <ds:schemaRef ds:uri="http://schemas.microsoft.com/office/2006/documentManagement/types"/>
-    <ds:schemaRef ds:uri="d6656b4d-3fa0-4709-acfb-d5e813445d1e"/>
-    <ds:schemaRef ds:uri="http://purl.org/dc/terms/"/>
-    <ds:schemaRef ds:uri="http://schemas.microsoft.com/office/infopath/2007/PartnerControls"/>
-    <ds:schemaRef ds:uri="37af3f4b-4b66-46f9-8456-831d9bc3e737"/>
-    <ds:schemaRef ds:uri="http://schemas.openxmlformats.org/package/2006/metadata/core-properties"/>
-    <ds:schemaRef ds:uri="http://schemas.microsoft.com/office/2006/metadata/properties"/>
-    <ds:schemaRef ds:uri="http://www.w3.org/XML/1998/namespace"/>
-    <ds:schemaRef ds:uri="http://purl.org/dc/dcmitype/"/>
+    <ds:schemaRef ds:uri="http://schemas.microsoft.com/sharepoint/v3/contenttype/forms"/>
   </ds:schemaRefs>
 </ds:datastoreItem>
 </file>